--- a/Slots/遊戲發想/急速糖果 2/提案/CANDY_RUSH_2_提案說明_v13.pptx
+++ b/Slots/遊戲發想/急速糖果 2/提案/CANDY_RUSH_2_提案說明_v13.pptx
@@ -122,28 +122,28 @@
   <p:extLst>
     <p:ext uri="{521415D9-36F7-43E2-AB2F-B90AF26B5E84}">
       <p14:sectionLst xmlns:p14="http://schemas.microsoft.com/office/powerpoint/2010/main">
-        <p14:section name="封面" id="{ec26a1f3-b01d-3d56-a674-08d2ba099ad7}">
+        <p14:section name="封面" id="{752dc0aa-8060-6337-d3a0-62c625ce8c90}">
           <p14:sldIdLst>
             <p14:sldId id="256"/>
           </p14:sldIdLst>
         </p14:section>
-        <p14:section name="01 遊戲概述" id="{8a4ed11c-1ce7-0a6f-1cdb-3b777d9f0b09}">
+        <p14:section name="01 遊戲概述" id="{596ae9fd-a998-944d-4bb2-89e4710a63ad}">
           <p14:sldIdLst>
             <p14:sldId id="257"/>
           </p14:sldIdLst>
         </p14:section>
-        <p14:section name="02 遊戲規格一覽" id="{76133f08-f33e-e09e-9d32-c4c283cabad1}">
+        <p14:section name="02 遊戲規格一覽" id="{e66278f0-983e-d273-0240-00a8b8259df6}">
           <p14:sldIdLst>
             <p14:sldId id="258"/>
           </p14:sldIdLst>
         </p14:section>
-        <p14:section name="03 符號說明與賠付" id="{1fd6cef6-2535-9257-db05-ab02b2cde3f8}">
+        <p14:section name="03 符號說明與賠付" id="{9aa863b8-5f9d-ec2a-8b82-16a2d1cfa7cc}">
           <p14:sldIdLst>
             <p14:sldId id="259"/>
             <p14:sldId id="260"/>
           </p14:sldIdLst>
         </p14:section>
-        <p14:section name="04 核心玩法" id="{a4b70d55-8826-68cd-02bd-4124131b9794}">
+        <p14:section name="04 核心玩法" id="{bc5b75fb-2c66-11eb-5116-6e71bc9e3e27}">
           <p14:sldIdLst>
             <p14:sldId id="261"/>
             <p14:sldId id="262"/>
@@ -151,29 +151,29 @@
             <p14:sldId id="264"/>
           </p14:sldIdLst>
         </p14:section>
-        <p14:section name="05 免費遊戲" id="{a735deac-a9f0-7fcd-e3e3-538cd5dc8a72}">
+        <p14:section name="05 免費遊戲" id="{eab741ff-55aa-c840-9a8b-6dfdf93ca332}">
           <p14:sldIdLst>
             <p14:sldId id="265"/>
           </p14:sldIdLst>
         </p14:section>
-        <p14:section name="06 遊戲流程圖" id="{2a4868a2-57e2-83f8-9785-62816bb48942}">
+        <p14:section name="06 遊戲流程圖" id="{58fa5b85-79e0-27a4-ae8f-4d6810b79110}">
           <p14:sldIdLst>
             <p14:sldId id="266"/>
           </p14:sldIdLst>
         </p14:section>
-        <p14:section name="07 特殊押注" id="{5c62031d-4301-dee8-90e7-0b102e1f2057}">
+        <p14:section name="07 特殊押注" id="{fd64bebb-9704-62b7-bc85-d51629e4aa68}">
           <p14:sldIdLst>
             <p14:sldId id="267"/>
             <p14:sldId id="268"/>
           </p14:sldIdLst>
         </p14:section>
-        <p14:section name="08 與競品差異對照" id="{3571701b-b042-7fd3-0742-8e0e5418a380}">
+        <p14:section name="08 與競品差異對照" id="{1ddb805e-cb5f-6ee7-a826-53da41d01cc0}">
           <p14:sldIdLst>
             <p14:sldId id="269"/>
             <p14:sldId id="270"/>
           </p14:sldIdLst>
         </p14:section>
-        <p14:section name="Q&amp;A" id="{6517ed51-d27f-1d6e-9dc4-964a4dfb19a4}">
+        <p14:section name="Q&amp;A" id="{6520f74d-f161-4351-e094-1108add72a69}">
           <p14:sldIdLst>
             <p14:sldId id="271"/>
           </p14:sldIdLst>
@@ -2505,10 +2505,6 @@
             <a:prstDash val="solid"/>
           </a:ln>
         </p:spPr>
-        <p:txBody>
-          <a:bodyPr/>
-          <a:p/>
-        </p:txBody>
       </p:sp>
       <p:sp>
         <p:nvSpPr>
@@ -2575,10 +2571,6 @@
             <a:prstDash val="solid"/>
           </a:ln>
         </p:spPr>
-        <p:txBody>
-          <a:bodyPr/>
-          <a:p/>
-        </p:txBody>
       </p:sp>
       <p:sp>
         <p:nvSpPr>
@@ -2645,10 +2637,6 @@
             <a:prstDash val="solid"/>
           </a:ln>
         </p:spPr>
-        <p:txBody>
-          <a:bodyPr/>
-          <a:p/>
-        </p:txBody>
       </p:sp>
       <p:sp>
         <p:nvSpPr>
@@ -2864,10 +2852,6 @@
             </a:outerShdw>
           </a:effectLst>
         </p:spPr>
-        <p:txBody>
-          <a:bodyPr/>
-          <a:p/>
-        </p:txBody>
       </p:sp>
       <p:sp>
         <p:nvSpPr>
@@ -2973,10 +2957,6 @@
             <a:prstDash val="solid"/>
           </a:ln>
         </p:spPr>
-        <p:txBody>
-          <a:bodyPr/>
-          <a:p/>
-        </p:txBody>
       </p:sp>
       <p:sp>
         <p:nvSpPr>
@@ -3121,10 +3101,6 @@
             <a:prstDash val="solid"/>
           </a:ln>
         </p:spPr>
-        <p:txBody>
-          <a:bodyPr/>
-          <a:p/>
-        </p:txBody>
       </p:sp>
       <p:sp>
         <p:nvSpPr>
@@ -3269,10 +3245,6 @@
             <a:prstDash val="solid"/>
           </a:ln>
         </p:spPr>
-        <p:txBody>
-          <a:bodyPr/>
-          <a:p/>
-        </p:txBody>
       </p:sp>
       <p:sp>
         <p:nvSpPr>
@@ -3361,11 +3333,11 @@
         <p:spPr>
           <a:xfrm>
             <a:off x="7571232" y="1399032"/>
-            <a:ext cx="4167737" cy="4837176"/>
+            <a:ext cx="4172353" cy="4837176"/>
           </a:xfrm>
           <a:prstGeom prst="roundRect">
             <a:avLst>
-              <a:gd name="adj" fmla="val 1755"/>
+              <a:gd name="adj" fmla="val 1753"/>
             </a:avLst>
           </a:prstGeom>
           <a:solidFill>
@@ -3385,10 +3357,6 @@
             </a:outerShdw>
           </a:effectLst>
         </p:spPr>
-        <p:txBody>
-          <a:bodyPr/>
-          <a:p/>
-        </p:txBody>
       </p:sp>
       <p:pic>
         <p:nvPicPr>
@@ -3407,7 +3375,7 @@
         <p:spPr>
           <a:xfrm>
             <a:off x="7635240" y="1463040"/>
-            <a:ext cx="4039721" cy="4709160"/>
+            <a:ext cx="4044337" cy="4709160"/>
           </a:xfrm>
           <a:prstGeom prst="rect">
             <a:avLst/>
@@ -3423,7 +3391,7 @@
         <p:spPr>
           <a:xfrm>
             <a:off x="7269480" y="6281928"/>
-            <a:ext cx="4771241" cy="292608"/>
+            <a:ext cx="4775857" cy="292608"/>
           </a:xfrm>
           <a:prstGeom prst="rect">
             <a:avLst/>
@@ -3486,7 +3454,7 @@
                 <a:ea typeface="Microsoft JhengHei" pitchFamily="34" charset="-122"/>
                 <a:cs typeface="Microsoft JhengHei" pitchFamily="34" charset="-120"/>
               </a:rPr>
-              <a:t>* 為待確認數值；5×5 每軸最多 1 顆 Scatter，全盤最多 5 顆，故只有 3／4／5 三檔。</a:t>
+              <a:t>* 為待確認數值；5×5 每軸最多 1 顆 Scatter，觸發表只到 5 顆。</a:t>
             </a:r>
             <a:endParaRPr lang="en-US" sz="1100" dirty="0"/>
           </a:p>
@@ -3755,10 +3723,6 @@
             <a:prstDash val="solid"/>
           </a:ln>
         </p:spPr>
-        <p:txBody>
-          <a:bodyPr/>
-          <a:p/>
-        </p:txBody>
       </p:sp>
       <p:sp>
         <p:nvSpPr>
@@ -3861,10 +3825,6 @@
             <a:tailEnd type="triangle"/>
           </a:ln>
         </p:spPr>
-        <p:txBody>
-          <a:bodyPr/>
-          <a:p/>
-        </p:txBody>
       </p:sp>
       <p:sp>
         <p:nvSpPr>
@@ -3892,10 +3852,6 @@
             <a:prstDash val="solid"/>
           </a:ln>
         </p:spPr>
-        <p:txBody>
-          <a:bodyPr/>
-          <a:p/>
-        </p:txBody>
       </p:sp>
       <p:sp>
         <p:nvSpPr>
@@ -3998,10 +3954,6 @@
             <a:tailEnd type="triangle"/>
           </a:ln>
         </p:spPr>
-        <p:txBody>
-          <a:bodyPr/>
-          <a:p/>
-        </p:txBody>
       </p:sp>
       <p:sp>
         <p:nvSpPr>
@@ -4029,10 +3981,6 @@
             <a:prstDash val="solid"/>
           </a:ln>
         </p:spPr>
-        <p:txBody>
-          <a:bodyPr/>
-          <a:p/>
-        </p:txBody>
       </p:sp>
       <p:sp>
         <p:nvSpPr>
@@ -4135,10 +4083,6 @@
             <a:tailEnd type="triangle"/>
           </a:ln>
         </p:spPr>
-        <p:txBody>
-          <a:bodyPr/>
-          <a:p/>
-        </p:txBody>
       </p:sp>
       <p:sp>
         <p:nvSpPr>
@@ -4166,10 +4110,6 @@
             <a:prstDash val="solid"/>
           </a:ln>
         </p:spPr>
-        <p:txBody>
-          <a:bodyPr/>
-          <a:p/>
-        </p:txBody>
       </p:sp>
       <p:sp>
         <p:nvSpPr>
@@ -4272,10 +4212,6 @@
             <a:tailEnd type="triangle"/>
           </a:ln>
         </p:spPr>
-        <p:txBody>
-          <a:bodyPr/>
-          <a:p/>
-        </p:txBody>
       </p:sp>
       <p:sp>
         <p:nvSpPr>
@@ -4303,10 +4239,6 @@
             <a:prstDash val="solid"/>
           </a:ln>
         </p:spPr>
-        <p:txBody>
-          <a:bodyPr/>
-          <a:p/>
-        </p:txBody>
       </p:sp>
       <p:sp>
         <p:nvSpPr>
@@ -4408,10 +4340,6 @@
             <a:prstDash val="solid"/>
           </a:ln>
         </p:spPr>
-        <p:txBody>
-          <a:bodyPr/>
-          <a:p/>
-        </p:txBody>
       </p:sp>
       <p:sp>
         <p:nvSpPr>
@@ -4435,10 +4363,6 @@
             <a:prstDash val="solid"/>
           </a:ln>
         </p:spPr>
-        <p:txBody>
-          <a:bodyPr/>
-          <a:p/>
-        </p:txBody>
       </p:sp>
       <p:sp>
         <p:nvSpPr>
@@ -4463,10 +4387,6 @@
             <a:headEnd type="triangle"/>
           </a:ln>
         </p:spPr>
-        <p:txBody>
-          <a:bodyPr/>
-          <a:p/>
-        </p:txBody>
       </p:sp>
       <p:sp>
         <p:nvSpPr>
@@ -4533,10 +4453,6 @@
             <a:prstDash val="solid"/>
           </a:ln>
         </p:spPr>
-        <p:txBody>
-          <a:bodyPr/>
-          <a:p/>
-        </p:txBody>
       </p:sp>
       <p:sp>
         <p:nvSpPr>
@@ -4562,10 +4478,6 @@
             <a:prstDash val="solid"/>
           </a:ln>
         </p:spPr>
-        <p:txBody>
-          <a:bodyPr/>
-          <a:p/>
-        </p:txBody>
       </p:sp>
       <p:sp>
         <p:nvSpPr>
@@ -4678,7 +4590,7 @@
                 <a:ea typeface="Microsoft JhengHei" pitchFamily="34" charset="-122"/>
                 <a:cs typeface="Microsoft JhengHei" pitchFamily="34" charset="-120"/>
               </a:rPr>
-              <a:t>一般押注第一次消除時全盤倍數和還是 0 → 以 ×1 計分（Extra Bet 開場即有底板，不適用）；倍數從第二段才開始發揮。</a:t>
+              <a:t>第一次消除時全盤倍數和還是 0 → 以 ×1 計分；倍數從第二段才開始發揮。</a:t>
             </a:r>
             <a:endParaRPr lang="en-US" sz="1250" dirty="0"/>
           </a:p>
@@ -4710,10 +4622,6 @@
             <a:prstDash val="solid"/>
           </a:ln>
         </p:spPr>
-        <p:txBody>
-          <a:bodyPr/>
-          <a:p/>
-        </p:txBody>
       </p:sp>
       <p:sp>
         <p:nvSpPr>
@@ -4739,10 +4647,6 @@
             <a:prstDash val="solid"/>
           </a:ln>
         </p:spPr>
-        <p:txBody>
-          <a:bodyPr/>
-          <a:p/>
-        </p:txBody>
       </p:sp>
       <p:sp>
         <p:nvSpPr>
@@ -4887,10 +4791,6 @@
             <a:prstDash val="solid"/>
           </a:ln>
         </p:spPr>
-        <p:txBody>
-          <a:bodyPr/>
-          <a:p/>
-        </p:txBody>
       </p:sp>
       <p:sp>
         <p:nvSpPr>
@@ -4916,10 +4816,6 @@
             <a:prstDash val="solid"/>
           </a:ln>
         </p:spPr>
-        <p:txBody>
-          <a:bodyPr/>
-          <a:p/>
-        </p:txBody>
       </p:sp>
       <p:sp>
         <p:nvSpPr>
@@ -5252,7 +5148,7 @@
                 <a:ea typeface="Microsoft JhengHei" pitchFamily="34" charset="-122"/>
                 <a:cs typeface="Microsoft JhengHei" pitchFamily="34" charset="-120"/>
               </a:rPr>
-              <a:t>一句話：花 10 倍押注，開場就在盤面隨機 3 格放上 ×5~×50 倍數底板，第一次消除就乘上去。</a:t>
+              <a:t>一句話：花 </a:t>
             </a:r>
             <a:pPr indent="0" marL="0">
               <a:buNone/>
@@ -5266,7 +5162,7 @@
                 <a:ea typeface="Microsoft JhengHei" pitchFamily="34" charset="-122"/>
                 <a:cs typeface="Microsoft JhengHei" pitchFamily="34" charset="-120"/>
               </a:rPr>
-              <a:t/>
+              <a:t>10 倍</a:t>
             </a:r>
             <a:pPr indent="0" marL="0">
               <a:buNone/>
@@ -5280,7 +5176,7 @@
                 <a:ea typeface="Microsoft JhengHei" pitchFamily="34" charset="-122"/>
                 <a:cs typeface="Microsoft JhengHei" pitchFamily="34" charset="-120"/>
               </a:rPr>
-              <a:t/>
+              <a:t>押注，開場就在盤面隨機 </a:t>
             </a:r>
             <a:pPr indent="0" marL="0">
               <a:buNone/>
@@ -5294,7 +5190,7 @@
                 <a:ea typeface="Microsoft JhengHei" pitchFamily="34" charset="-122"/>
                 <a:cs typeface="Microsoft JhengHei" pitchFamily="34" charset="-120"/>
               </a:rPr>
-              <a:t/>
+              <a:t>3 格放上 ×5~×50 倍數底板</a:t>
             </a:r>
             <a:pPr indent="0" marL="0">
               <a:buNone/>
@@ -5308,7 +5204,7 @@
                 <a:ea typeface="Microsoft JhengHei" pitchFamily="34" charset="-122"/>
                 <a:cs typeface="Microsoft JhengHei" pitchFamily="34" charset="-120"/>
               </a:rPr>
-              <a:t/>
+              <a:t>，第一次消除就乘上去。</a:t>
             </a:r>
             <a:endParaRPr lang="en-US" sz="1500" dirty="0"/>
           </a:p>
@@ -5323,11 +5219,11 @@
         <p:spPr>
           <a:xfrm>
             <a:off x="640080" y="2039112"/>
-            <a:ext cx="3030340" cy="3511296"/>
+            <a:ext cx="3033656" cy="3511296"/>
           </a:xfrm>
           <a:prstGeom prst="roundRect">
             <a:avLst>
-              <a:gd name="adj" fmla="val 2414"/>
+              <a:gd name="adj" fmla="val 2411"/>
             </a:avLst>
           </a:prstGeom>
           <a:solidFill>
@@ -5347,10 +5243,6 @@
             </a:outerShdw>
           </a:effectLst>
         </p:spPr>
-        <p:txBody>
-          <a:bodyPr/>
-          <a:p/>
-        </p:txBody>
       </p:sp>
       <p:pic>
         <p:nvPicPr>
@@ -5369,7 +5261,7 @@
         <p:spPr>
           <a:xfrm>
             <a:off x="704088" y="2103120"/>
-            <a:ext cx="2902324" cy="3383280"/>
+            <a:ext cx="2905640" cy="3383280"/>
           </a:xfrm>
           <a:prstGeom prst="rect">
             <a:avLst/>
@@ -5385,7 +5277,7 @@
         <p:spPr>
           <a:xfrm>
             <a:off x="338328" y="5596128"/>
-            <a:ext cx="3633844" cy="292608"/>
+            <a:ext cx="3637160" cy="292608"/>
           </a:xfrm>
           <a:prstGeom prst="rect">
             <a:avLst/>
@@ -5409,7 +5301,7 @@
                 <a:ea typeface="Microsoft JhengHei" pitchFamily="34" charset="-122"/>
                 <a:cs typeface="Microsoft JhengHei" pitchFamily="34" charset="-120"/>
               </a:rPr>
-              <a:t>開場 3 個底板 ×50、×20、×5 → 全盤和 75</a:t>
+              <a:t>開場 3 個底板 ×15、×7、×6 → 全盤和 28</a:t>
             </a:r>
             <a:endParaRPr lang="en-US" sz="1150" dirty="0"/>
           </a:p>
@@ -5424,11 +5316,11 @@
         <p:spPr>
           <a:xfrm>
             <a:off x="3822192" y="2039112"/>
-            <a:ext cx="3030340" cy="3511296"/>
+            <a:ext cx="3033656" cy="3511296"/>
           </a:xfrm>
           <a:prstGeom prst="roundRect">
             <a:avLst>
-              <a:gd name="adj" fmla="val 2414"/>
+              <a:gd name="adj" fmla="val 2411"/>
             </a:avLst>
           </a:prstGeom>
           <a:solidFill>
@@ -5448,10 +5340,6 @@
             </a:outerShdw>
           </a:effectLst>
         </p:spPr>
-        <p:txBody>
-          <a:bodyPr/>
-          <a:p/>
-        </p:txBody>
       </p:sp>
       <p:pic>
         <p:nvPicPr>
@@ -5470,7 +5358,7 @@
         <p:spPr>
           <a:xfrm>
             <a:off x="3886200" y="2103120"/>
-            <a:ext cx="2902324" cy="3383280"/>
+            <a:ext cx="2905640" cy="3383280"/>
           </a:xfrm>
           <a:prstGeom prst="rect">
             <a:avLst/>
@@ -5486,7 +5374,7 @@
         <p:spPr>
           <a:xfrm>
             <a:off x="3520440" y="5596128"/>
-            <a:ext cx="3633844" cy="292608"/>
+            <a:ext cx="3637160" cy="292608"/>
           </a:xfrm>
           <a:prstGeom prst="rect">
             <a:avLst/>
@@ -5510,7 +5398,7 @@
                 <a:ea typeface="Microsoft JhengHei" pitchFamily="34" charset="-122"/>
                 <a:cs typeface="Microsoft JhengHei" pitchFamily="34" charset="-120"/>
               </a:rPr>
-              <a:t>第一次消除 M6×7 × 75 = +37.5</a:t>
+              <a:t>第一次消除 M6×7 × 28 = +14</a:t>
             </a:r>
             <a:endParaRPr lang="en-US" sz="1150" dirty="0"/>
           </a:p>
@@ -6042,7 +5930,7 @@
                           <a:ea typeface="Microsoft JhengHei" pitchFamily="34" charset="-122"/>
                           <a:cs typeface="Microsoft JhengHei" pitchFamily="34" charset="-120"/>
                         </a:rPr>
-                        <a:t>×5 / ×6 / ×7 / ×8 / ×9 / ×10 / ×15 / ×20 / ×25 / ×30 / ×35 / ×40 / ×45 / ×50</a:t>
+                        <a:t>×5～×10、×15～×50（共 14 檔）</a:t>
                       </a:r>
                       <a:endParaRPr lang="en-US" sz="1250" dirty="0">
                         <a:latin typeface="Microsoft JhengHei" charset="0"/>
@@ -6180,7 +6068,7 @@
                           <a:ea typeface="Microsoft JhengHei" pitchFamily="34" charset="-122"/>
                           <a:cs typeface="Microsoft JhengHei" pitchFamily="34" charset="-120"/>
                         </a:rPr>
-                        <a:t>⏳ 待定（14 檔，暫以緩降佔位）</a:t>
+                        <a:t>待定（暫以緩降值）*</a:t>
                       </a:r>
                       <a:endParaRPr lang="en-US" sz="1250" dirty="0">
                         <a:latin typeface="Microsoft JhengHei" charset="0"/>
@@ -6545,7 +6433,7 @@
                 <a:ea typeface="Microsoft JhengHei" pitchFamily="34" charset="-122"/>
                 <a:cs typeface="Microsoft JhengHei" pitchFamily="34" charset="-120"/>
               </a:rPr>
-              <a:t>※ 底板格之後以群集成員消除時照常 +1（例：20 → 21）；派彩仍以原始押注計算；* 為待確認數值。</a:t>
+              <a:t>※ 底板格之後以群集成員消除時照常 +1（例：15 → 16）；派彩仍以原始押注計算；* 為待確認數值。</a:t>
             </a:r>
             <a:endParaRPr lang="en-US" sz="1100" dirty="0"/>
           </a:p>
@@ -6814,7 +6702,7 @@
                 <a:gridCol w="1554480"/>
                 <a:gridCol w="5120640"/>
               </a:tblGrid>
-              <a:tr h="566928">
+              <a:tr h="640080">
                 <a:tc>
                   <a:txBody>
                     <a:bodyPr/>
@@ -6952,7 +6840,7 @@
                   </a:tcPr>
                 </a:tc>
               </a:tr>
-              <a:tr h="566928">
+              <a:tr h="640080">
                 <a:tc>
                   <a:txBody>
                     <a:bodyPr/>
@@ -7090,7 +6978,7 @@
                   </a:tcPr>
                 </a:tc>
               </a:tr>
-              <a:tr h="566928">
+              <a:tr h="640080">
                 <a:tc>
                   <a:txBody>
                     <a:bodyPr/>
@@ -7228,7 +7116,7 @@
                   </a:tcPr>
                 </a:tc>
               </a:tr>
-              <a:tr h="566928">
+              <a:tr h="640080">
                 <a:tc>
                   <a:txBody>
                     <a:bodyPr/>
@@ -7366,7 +7254,7 @@
                   </a:tcPr>
                 </a:tc>
               </a:tr>
-              <a:tr h="566928">
+              <a:tr h="640080">
                 <a:tc>
                   <a:txBody>
                     <a:bodyPr/>
@@ -7504,144 +7392,6 @@
                   </a:tcPr>
                 </a:tc>
               </a:tr>
-              <a:tr h="566928">
-                <a:tc>
-                  <a:txBody>
-                    <a:bodyPr/>
-                    <a:lstStyle/>
-                    <a:p>
-                      <a:pPr algn="l" indent="0" marL="0">
-                        <a:buNone/>
-                      </a:pPr>
-                      <a:r>
-                        <a:rPr lang="en-US" sz="1250" b="1" dirty="0">
-                          <a:solidFill>
-                            <a:srgbClr val="5B1446"/>
-                          </a:solidFill>
-                          <a:latin typeface="Microsoft JhengHei" pitchFamily="34" charset="0"/>
-                          <a:ea typeface="Microsoft JhengHei" pitchFamily="34" charset="-122"/>
-                          <a:cs typeface="Microsoft JhengHei" pitchFamily="34" charset="-120"/>
-                        </a:rPr>
-                        <a:t>Super Free</a:t>
-                      </a:r>
-                      <a:endParaRPr lang="en-US" sz="1250" dirty="0">
-                        <a:latin typeface="Microsoft JhengHei" charset="0"/>
-                        <a:ea typeface="Microsoft JhengHei" charset="0"/>
-                        <a:cs typeface="Microsoft JhengHei" charset="0"/>
-                      </a:endParaRPr>
-                    </a:p>
-                  </a:txBody>
-                  <a:tcPr marL="91440" marR="91440" marT="0" marB="0" anchor="ctr">
-                    <a:lnL w="9525" cap="flat" cmpd="sng" algn="ctr">
-                      <a:solidFill>
-                        <a:srgbClr val="F3D9A6"/>
-                      </a:solidFill>
-                      <a:prstDash val="solid"/>
-                      <a:round/>
-                      <a:headEnd type="none" w="med" len="med"/>
-                      <a:tailEnd type="none" w="med" len="med"/>
-                    </a:lnL>
-                    <a:lnR w="9525" cap="flat" cmpd="sng" algn="ctr">
-                      <a:solidFill>
-                        <a:srgbClr val="F3D9A6"/>
-                      </a:solidFill>
-                      <a:prstDash val="solid"/>
-                      <a:round/>
-                      <a:headEnd type="none" w="med" len="med"/>
-                      <a:tailEnd type="none" w="med" len="med"/>
-                    </a:lnR>
-                    <a:lnT w="9525" cap="flat" cmpd="sng" algn="ctr">
-                      <a:solidFill>
-                        <a:srgbClr val="F3D9A6"/>
-                      </a:solidFill>
-                      <a:prstDash val="solid"/>
-                      <a:round/>
-                      <a:headEnd type="none" w="med" len="med"/>
-                      <a:tailEnd type="none" w="med" len="med"/>
-                    </a:lnT>
-                    <a:lnB w="9525" cap="flat" cmpd="sng" algn="ctr">
-                      <a:solidFill>
-                        <a:srgbClr val="F3D9A6"/>
-                      </a:solidFill>
-                      <a:prstDash val="solid"/>
-                      <a:round/>
-                      <a:headEnd type="none" w="med" len="med"/>
-                      <a:tailEnd type="none" w="med" len="med"/>
-                    </a:lnB>
-                    <a:solidFill>
-                      <a:srgbClr val="FFFFFF"/>
-                    </a:solidFill>
-                  </a:tcPr>
-                </a:tc>
-                <a:tc>
-                  <a:txBody>
-                    <a:bodyPr/>
-                    <a:lstStyle/>
-                    <a:p>
-                      <a:pPr algn="l" indent="0" marL="0">
-                        <a:buNone/>
-                      </a:pPr>
-                      <a:r>
-                        <a:rPr lang="en-US" sz="1250" dirty="0">
-                          <a:solidFill>
-                            <a:srgbClr val="3B1430"/>
-                          </a:solidFill>
-                          <a:latin typeface="Microsoft JhengHei" pitchFamily="34" charset="0"/>
-                          <a:ea typeface="Microsoft JhengHei" pitchFamily="34" charset="-122"/>
-                          <a:cs typeface="Microsoft JhengHei" pitchFamily="34" charset="-120"/>
-                        </a:rPr>
-                        <a:t>起始倍數強化版是否保留 *</a:t>
-                      </a:r>
-                      <a:endParaRPr lang="en-US" sz="1250" dirty="0">
-                        <a:latin typeface="Microsoft JhengHei" charset="0"/>
-                        <a:ea typeface="Microsoft JhengHei" charset="0"/>
-                        <a:cs typeface="Microsoft JhengHei" charset="0"/>
-                      </a:endParaRPr>
-                    </a:p>
-                  </a:txBody>
-                  <a:tcPr marL="91440" marR="91440" marT="0" marB="0" anchor="ctr">
-                    <a:lnL w="9525" cap="flat" cmpd="sng" algn="ctr">
-                      <a:solidFill>
-                        <a:srgbClr val="F3D9A6"/>
-                      </a:solidFill>
-                      <a:prstDash val="solid"/>
-                      <a:round/>
-                      <a:headEnd type="none" w="med" len="med"/>
-                      <a:tailEnd type="none" w="med" len="med"/>
-                    </a:lnL>
-                    <a:lnR w="9525" cap="flat" cmpd="sng" algn="ctr">
-                      <a:solidFill>
-                        <a:srgbClr val="F3D9A6"/>
-                      </a:solidFill>
-                      <a:prstDash val="solid"/>
-                      <a:round/>
-                      <a:headEnd type="none" w="med" len="med"/>
-                      <a:tailEnd type="none" w="med" len="med"/>
-                    </a:lnR>
-                    <a:lnT w="9525" cap="flat" cmpd="sng" algn="ctr">
-                      <a:solidFill>
-                        <a:srgbClr val="F3D9A6"/>
-                      </a:solidFill>
-                      <a:prstDash val="solid"/>
-                      <a:round/>
-                      <a:headEnd type="none" w="med" len="med"/>
-                      <a:tailEnd type="none" w="med" len="med"/>
-                    </a:lnT>
-                    <a:lnB w="9525" cap="flat" cmpd="sng" algn="ctr">
-                      <a:solidFill>
-                        <a:srgbClr val="F3D9A6"/>
-                      </a:solidFill>
-                      <a:prstDash val="solid"/>
-                      <a:round/>
-                      <a:headEnd type="none" w="med" len="med"/>
-                      <a:tailEnd type="none" w="med" len="med"/>
-                    </a:lnB>
-                    <a:solidFill>
-                      <a:srgbClr val="FFFFFF"/>
-                    </a:solidFill>
-                  </a:tcPr>
-                </a:tc>
-              </a:tr>
             </a:tbl>
           </a:graphicData>
         </a:graphic>
@@ -7655,11 +7405,11 @@
         <p:spPr>
           <a:xfrm>
             <a:off x="7754112" y="1399032"/>
-            <a:ext cx="3932413" cy="4562856"/>
+            <a:ext cx="3936761" cy="4562856"/>
           </a:xfrm>
           <a:prstGeom prst="roundRect">
             <a:avLst>
-              <a:gd name="adj" fmla="val 1860"/>
+              <a:gd name="adj" fmla="val 1858"/>
             </a:avLst>
           </a:prstGeom>
           <a:solidFill>
@@ -7679,10 +7429,6 @@
             </a:outerShdw>
           </a:effectLst>
         </p:spPr>
-        <p:txBody>
-          <a:bodyPr/>
-          <a:p/>
-        </p:txBody>
       </p:sp>
       <p:pic>
         <p:nvPicPr>
@@ -7701,7 +7447,7 @@
         <p:spPr>
           <a:xfrm>
             <a:off x="7818120" y="1463040"/>
-            <a:ext cx="3804397" cy="4434840"/>
+            <a:ext cx="3808745" cy="4434840"/>
           </a:xfrm>
           <a:prstGeom prst="rect">
             <a:avLst/>
@@ -7717,7 +7463,7 @@
         <p:spPr>
           <a:xfrm>
             <a:off x="7452360" y="6007608"/>
-            <a:ext cx="4535917" cy="292608"/>
+            <a:ext cx="4540265" cy="292608"/>
           </a:xfrm>
           <a:prstGeom prst="rect">
             <a:avLst/>
@@ -8794,7 +8540,7 @@
                           <a:ea typeface="Microsoft JhengHei" pitchFamily="34" charset="-122"/>
                           <a:cs typeface="Microsoft JhengHei" pitchFamily="34" charset="-120"/>
                         </a:rPr>
-                        <a:t>4~7 連同 Sugar Rush（連線數 -1）；8/9/10+ 自訂爆炸區</a:t>
+                        <a:t>4～7 連沿用、8／9／10+ 自訂爆炸區（4～10+）</a:t>
                       </a:r>
                       <a:endParaRPr lang="en-US" sz="1250" dirty="0">
                         <a:latin typeface="Microsoft JhengHei" charset="0"/>
@@ -10367,10 +10113,6 @@
             </a:outerShdw>
           </a:effectLst>
         </p:spPr>
-        <p:txBody>
-          <a:bodyPr/>
-          <a:p/>
-        </p:txBody>
       </p:sp>
       <p:sp>
         <p:nvSpPr>
@@ -10476,10 +10218,6 @@
             <a:prstDash val="solid"/>
           </a:ln>
         </p:spPr>
-        <p:txBody>
-          <a:bodyPr/>
-          <a:p/>
-        </p:txBody>
       </p:sp>
       <p:sp>
         <p:nvSpPr>
@@ -10617,10 +10355,6 @@
             </a:outerShdw>
           </a:effectLst>
         </p:spPr>
-        <p:txBody>
-          <a:bodyPr/>
-          <a:p/>
-        </p:txBody>
       </p:sp>
       <p:sp>
         <p:nvSpPr>
@@ -10726,10 +10460,6 @@
             <a:prstDash val="solid"/>
           </a:ln>
         </p:spPr>
-        <p:txBody>
-          <a:bodyPr/>
-          <a:p/>
-        </p:txBody>
       </p:sp>
       <p:sp>
         <p:nvSpPr>
@@ -10867,10 +10597,6 @@
             </a:outerShdw>
           </a:effectLst>
         </p:spPr>
-        <p:txBody>
-          <a:bodyPr/>
-          <a:p/>
-        </p:txBody>
       </p:sp>
       <p:sp>
         <p:nvSpPr>
@@ -10976,10 +10702,6 @@
             <a:prstDash val="solid"/>
           </a:ln>
         </p:spPr>
-        <p:txBody>
-          <a:bodyPr/>
-          <a:p/>
-        </p:txBody>
       </p:sp>
       <p:sp>
         <p:nvSpPr>
@@ -11057,8 +10779,7 @@
                 <a:ea typeface="Microsoft JhengHei" pitchFamily="34" charset="-122"/>
                 <a:cs typeface="Microsoft JhengHei" pitchFamily="34" charset="-120"/>
               </a:rPr>
-              <a:t>盤面變小，連帶下修成立群集的門檻
-中獎頻率因此高於原本 7×7（待數學以正式權重確認）</a:t>
+              <a:t>盤面變小，連帶下修成立群集的門檻</a:t>
             </a:r>
             <a:endParaRPr lang="en-US" sz="1300" dirty="0"/>
           </a:p>
@@ -11079,7 +10800,7 @@
                 <a:ea typeface="Microsoft JhengHei" pitchFamily="34" charset="-122"/>
                 <a:cs typeface="Microsoft JhengHei" pitchFamily="34" charset="-120"/>
               </a:rPr>
-              <a:t/>
+              <a:t>讓消除難度與原本 7×7 的節奏相當</a:t>
             </a:r>
             <a:endParaRPr lang="en-US" sz="1300" dirty="0"/>
           </a:p>
@@ -11118,7 +10839,7 @@
                 <a:ea typeface="Microsoft JhengHei" pitchFamily="34" charset="-122"/>
                 <a:cs typeface="Microsoft JhengHei" pitchFamily="34" charset="-120"/>
               </a:rPr>
-              <a:t>※ 賠率值沿用 Sugar Rush，4~7 連各檔連線數 -1，8／9／10+ 為自訂爆炸區，由數學依新盤面重新調整權重。</a:t>
+              <a:t>※ 賠率 4～7 連沿用 Sugar Rush（連線數 -1），8／9／10+ 為本作自訂爆炸區；權重由數學依新盤面重調。</a:t>
             </a:r>
             <a:endParaRPr lang="en-US" sz="1100" dirty="0"/>
           </a:p>
@@ -11366,11 +11087,7 @@
                 <a:ea typeface="Microsoft JhengHei" pitchFamily="34" charset="-122"/>
                 <a:cs typeface="Microsoft JhengHei" pitchFamily="34" charset="-120"/>
               </a:rPr>
-              <a:t>【數學】Extra Bet 底板權重（倍數值已定 14 檔；改版後每塊期望由 92 降為 8~22，10× 費用需重新評估）
-【數學】Buy Feature 價格、最大贏分與目標 RTP
-【PM】觸發的 FG 是否沿用 Extra Bet 底板
-【PM】是否保留 Super Free（起始倍數強化版）
-【美術】主題美術與符號正式名稱</a:t>
+              <a:t>【數學】</a:t>
             </a:r>
             <a:pPr indent="0" marL="0">
               <a:spcAft>
@@ -11387,7 +11104,7 @@
                 <a:ea typeface="Microsoft JhengHei" pitchFamily="34" charset="-122"/>
                 <a:cs typeface="Microsoft JhengHei" pitchFamily="34" charset="-120"/>
               </a:rPr>
-              <a:t/>
+              <a:t>Extra Bet 底板倍數權重（目前為暫定緩降值）</a:t>
             </a:r>
             <a:endParaRPr lang="en-US" sz="1450" dirty="0"/>
           </a:p>
@@ -11408,7 +11125,7 @@
                 <a:ea typeface="Microsoft JhengHei" pitchFamily="34" charset="-122"/>
                 <a:cs typeface="Microsoft JhengHei" pitchFamily="34" charset="-120"/>
               </a:rPr>
-              <a:t/>
+              <a:t>【數學】</a:t>
             </a:r>
             <a:pPr indent="0" marL="0">
               <a:spcAft>
@@ -11425,7 +11142,7 @@
                 <a:ea typeface="Microsoft JhengHei" pitchFamily="34" charset="-122"/>
                 <a:cs typeface="Microsoft JhengHei" pitchFamily="34" charset="-120"/>
               </a:rPr>
-              <a:t/>
+              <a:t>Buy Feature 價格、最大贏分與目標 RTP</a:t>
             </a:r>
             <a:endParaRPr lang="en-US" sz="1450" dirty="0"/>
           </a:p>
@@ -11446,7 +11163,7 @@
                 <a:ea typeface="Microsoft JhengHei" pitchFamily="34" charset="-122"/>
                 <a:cs typeface="Microsoft JhengHei" pitchFamily="34" charset="-120"/>
               </a:rPr>
-              <a:t/>
+              <a:t>【PM】</a:t>
             </a:r>
             <a:pPr indent="0" marL="0">
               <a:spcAft>
@@ -11463,7 +11180,7 @@
                 <a:ea typeface="Microsoft JhengHei" pitchFamily="34" charset="-122"/>
                 <a:cs typeface="Microsoft JhengHei" pitchFamily="34" charset="-120"/>
               </a:rPr>
-              <a:t/>
+              <a:t>觸發的 FG 是否沿用 Extra Bet 底板</a:t>
             </a:r>
             <a:endParaRPr lang="en-US" sz="1450" dirty="0"/>
           </a:p>
@@ -11484,7 +11201,7 @@
                 <a:ea typeface="Microsoft JhengHei" pitchFamily="34" charset="-122"/>
                 <a:cs typeface="Microsoft JhengHei" pitchFamily="34" charset="-120"/>
               </a:rPr>
-              <a:t/>
+              <a:t>【美術】</a:t>
             </a:r>
             <a:pPr indent="0" marL="0">
               <a:spcAft>
@@ -11501,83 +11218,7 @@
                 <a:ea typeface="Microsoft JhengHei" pitchFamily="34" charset="-122"/>
                 <a:cs typeface="Microsoft JhengHei" pitchFamily="34" charset="-120"/>
               </a:rPr>
-              <a:t/>
-            </a:r>
-            <a:endParaRPr lang="en-US" sz="1450" dirty="0"/>
-          </a:p>
-          <a:p>
-            <a:pPr marL="342900" indent="-342900">
-              <a:spcAft>
-                <a:spcPts val="800"/>
-              </a:spcAft>
-              <a:buSzPct val="100000"/>
-              <a:buChar char="•"/>
-            </a:pPr>
-            <a:r>
-              <a:rPr lang="en-US" sz="1450" b="1" dirty="0">
-                <a:solidFill>
-                  <a:srgbClr val="F4CE6E"/>
-                </a:solidFill>
-                <a:latin typeface="Microsoft JhengHei" pitchFamily="34" charset="0"/>
-                <a:ea typeface="Microsoft JhengHei" pitchFamily="34" charset="-122"/>
-                <a:cs typeface="Microsoft JhengHei" pitchFamily="34" charset="-120"/>
-              </a:rPr>
-              <a:t/>
-            </a:r>
-            <a:pPr indent="0" marL="0">
-              <a:spcAft>
-                <a:spcPts val="800"/>
-              </a:spcAft>
-              <a:buNone/>
-            </a:pPr>
-            <a:r>
-              <a:rPr lang="en-US" sz="1450" dirty="0">
-                <a:solidFill>
-                  <a:srgbClr val="FFF4F8"/>
-                </a:solidFill>
-                <a:latin typeface="Microsoft JhengHei" pitchFamily="34" charset="0"/>
-                <a:ea typeface="Microsoft JhengHei" pitchFamily="34" charset="-122"/>
-                <a:cs typeface="Microsoft JhengHei" pitchFamily="34" charset="-120"/>
-              </a:rPr>
-              <a:t/>
-            </a:r>
-            <a:endParaRPr lang="en-US" sz="1450" dirty="0"/>
-          </a:p>
-          <a:p>
-            <a:pPr marL="342900" indent="-342900">
-              <a:spcAft>
-                <a:spcPts val="800"/>
-              </a:spcAft>
-              <a:buSzPct val="100000"/>
-              <a:buChar char="•"/>
-            </a:pPr>
-            <a:r>
-              <a:rPr lang="en-US" sz="1450" b="1" dirty="0">
-                <a:solidFill>
-                  <a:srgbClr val="F4CE6E"/>
-                </a:solidFill>
-                <a:latin typeface="Microsoft JhengHei" pitchFamily="34" charset="0"/>
-                <a:ea typeface="Microsoft JhengHei" pitchFamily="34" charset="-122"/>
-                <a:cs typeface="Microsoft JhengHei" pitchFamily="34" charset="-120"/>
-              </a:rPr>
-              <a:t/>
-            </a:r>
-            <a:pPr indent="0" marL="0">
-              <a:spcAft>
-                <a:spcPts val="800"/>
-              </a:spcAft>
-              <a:buNone/>
-            </a:pPr>
-            <a:r>
-              <a:rPr lang="en-US" sz="1450" dirty="0">
-                <a:solidFill>
-                  <a:srgbClr val="FFF4F8"/>
-                </a:solidFill>
-                <a:latin typeface="Microsoft JhengHei" pitchFamily="34" charset="0"/>
-                <a:ea typeface="Microsoft JhengHei" pitchFamily="34" charset="-122"/>
-                <a:cs typeface="Microsoft JhengHei" pitchFamily="34" charset="-120"/>
-              </a:rPr>
-              <a:t/>
+              <a:t>主題美術與符號正式名稱</a:t>
             </a:r>
             <a:endParaRPr lang="en-US" sz="1450" dirty="0"/>
           </a:p>
@@ -11959,10 +11600,6 @@
             </a:outerShdw>
           </a:effectLst>
         </p:spPr>
-        <p:txBody>
-          <a:bodyPr/>
-          <a:p/>
-        </p:txBody>
       </p:sp>
       <p:sp>
         <p:nvSpPr>
@@ -12075,10 +11712,6 @@
             </a:outerShdw>
           </a:effectLst>
         </p:spPr>
-        <p:txBody>
-          <a:bodyPr/>
-          <a:p/>
-        </p:txBody>
       </p:sp>
       <p:sp>
         <p:nvSpPr>
@@ -12191,10 +11824,6 @@
             </a:outerShdw>
           </a:effectLst>
         </p:spPr>
-        <p:txBody>
-          <a:bodyPr/>
-          <a:p/>
-        </p:txBody>
       </p:sp>
       <p:sp>
         <p:nvSpPr>
@@ -12300,10 +11929,6 @@
             <a:prstDash val="solid"/>
           </a:ln>
         </p:spPr>
-        <p:txBody>
-          <a:bodyPr/>
-          <a:p/>
-        </p:txBody>
       </p:sp>
       <p:pic>
         <p:nvPicPr>
@@ -12419,11 +12044,11 @@
         <p:spPr>
           <a:xfrm>
             <a:off x="7388352" y="1261872"/>
-            <a:ext cx="4324619" cy="5020056"/>
+            <a:ext cx="4329415" cy="5020056"/>
           </a:xfrm>
           <a:prstGeom prst="roundRect">
             <a:avLst>
-              <a:gd name="adj" fmla="val 1692"/>
+              <a:gd name="adj" fmla="val 1690"/>
             </a:avLst>
           </a:prstGeom>
           <a:solidFill>
@@ -12443,10 +12068,6 @@
             </a:outerShdw>
           </a:effectLst>
         </p:spPr>
-        <p:txBody>
-          <a:bodyPr/>
-          <a:p/>
-        </p:txBody>
       </p:sp>
       <p:pic>
         <p:nvPicPr>
@@ -12465,7 +12086,7 @@
         <p:spPr>
           <a:xfrm>
             <a:off x="7452360" y="1325880"/>
-            <a:ext cx="4196603" cy="4892040"/>
+            <a:ext cx="4201399" cy="4892040"/>
           </a:xfrm>
           <a:prstGeom prst="rect">
             <a:avLst/>
@@ -12481,7 +12102,7 @@
         <p:spPr>
           <a:xfrm>
             <a:off x="7086600" y="6327648"/>
-            <a:ext cx="4928123" cy="292608"/>
+            <a:ext cx="4932919" cy="292608"/>
           </a:xfrm>
           <a:prstGeom prst="rect">
             <a:avLst/>
@@ -12686,10 +12307,6 @@
             </a:outerShdw>
           </a:effectLst>
         </p:spPr>
-        <p:txBody>
-          <a:bodyPr/>
-          <a:p/>
-        </p:txBody>
       </p:sp>
       <p:sp>
         <p:nvSpPr>
@@ -12802,10 +12419,6 @@
             </a:outerShdw>
           </a:effectLst>
         </p:spPr>
-        <p:txBody>
-          <a:bodyPr/>
-          <a:p/>
-        </p:txBody>
       </p:sp>
       <p:sp>
         <p:nvSpPr>
@@ -12918,10 +12531,6 @@
             </a:outerShdw>
           </a:effectLst>
         </p:spPr>
-        <p:txBody>
-          <a:bodyPr/>
-          <a:p/>
-        </p:txBody>
       </p:sp>
       <p:sp>
         <p:nvSpPr>
@@ -12956,7 +12565,7 @@
                 <a:ea typeface="Georgia" pitchFamily="34" charset="-122"/>
                 <a:cs typeface="Georgia" pitchFamily="34" charset="-120"/>
               </a:rPr>
-              <a:t>10~20 *</a:t>
+              <a:t>10~20</a:t>
             </a:r>
             <a:endParaRPr lang="en-US" sz="2800" dirty="0"/>
           </a:p>
@@ -13034,10 +12643,6 @@
             </a:outerShdw>
           </a:effectLst>
         </p:spPr>
-        <p:txBody>
-          <a:bodyPr/>
-          <a:p/>
-        </p:txBody>
       </p:sp>
       <p:sp>
         <p:nvSpPr>
@@ -13915,7 +13520,7 @@
                           <a:ea typeface="Microsoft JhengHei" pitchFamily="34" charset="-122"/>
                           <a:cs typeface="Microsoft JhengHei" pitchFamily="34" charset="-120"/>
                         </a:rPr>
-                        <a:t>3~5 Scatter → 10~20 局</a:t>
+                        <a:t>3 / 4 / 5 Scatter → 10 / 15 / 20 局</a:t>
                       </a:r>
                       <a:endParaRPr lang="en-US" sz="1250" dirty="0">
                         <a:latin typeface="Microsoft JhengHei" charset="0"/>
@@ -14278,7 +13883,7 @@
                 <a:ea typeface="Microsoft JhengHei" pitchFamily="34" charset="-122"/>
                 <a:cs typeface="Microsoft JhengHei" pitchFamily="34" charset="-120"/>
               </a:rPr>
-              <a:t>※ 依 game_rule.md v0.3（規則基底 H022 糖果轟炸 1000，賠率採 Sugar Rush）；* 為待確認數值。</a:t>
+              <a:t>※ 依 game_rule.md v0.3（規則基底 H022 糖果轟炸 1000）；* 為待確認數值。</a:t>
             </a:r>
             <a:endParaRPr lang="en-US" sz="1100" dirty="0"/>
           </a:p>
@@ -14452,10 +14057,6 @@
             <a:prstDash val="solid"/>
           </a:ln>
         </p:spPr>
-        <p:txBody>
-          <a:bodyPr/>
-          <a:p/>
-        </p:txBody>
       </p:sp>
       <p:sp>
         <p:nvSpPr>
@@ -14522,10 +14123,6 @@
             <a:prstDash val="solid"/>
           </a:ln>
         </p:spPr>
-        <p:txBody>
-          <a:bodyPr/>
-          <a:p/>
-        </p:txBody>
       </p:sp>
       <p:sp>
         <p:nvSpPr>
@@ -14592,10 +14189,6 @@
             <a:prstDash val="solid"/>
           </a:ln>
         </p:spPr>
-        <p:txBody>
-          <a:bodyPr/>
-          <a:p/>
-        </p:txBody>
       </p:sp>
       <p:sp>
         <p:nvSpPr>
@@ -14662,10 +14255,6 @@
             <a:prstDash val="solid"/>
           </a:ln>
         </p:spPr>
-        <p:txBody>
-          <a:bodyPr/>
-          <a:p/>
-        </p:txBody>
       </p:sp>
       <p:sp>
         <p:nvSpPr>
@@ -14732,10 +14321,6 @@
             <a:prstDash val="solid"/>
           </a:ln>
         </p:spPr>
-        <p:txBody>
-          <a:bodyPr/>
-          <a:p/>
-        </p:txBody>
       </p:sp>
       <p:sp>
         <p:nvSpPr>
@@ -14802,10 +14387,6 @@
             <a:prstDash val="solid"/>
           </a:ln>
         </p:spPr>
-        <p:txBody>
-          <a:bodyPr/>
-          <a:p/>
-        </p:txBody>
       </p:sp>
       <p:sp>
         <p:nvSpPr>
@@ -14872,10 +14453,6 @@
             <a:prstDash val="solid"/>
           </a:ln>
         </p:spPr>
-        <p:txBody>
-          <a:bodyPr/>
-          <a:p/>
-        </p:txBody>
       </p:sp>
       <p:sp>
         <p:nvSpPr>
@@ -14942,10 +14519,6 @@
             <a:prstDash val="solid"/>
           </a:ln>
         </p:spPr>
-        <p:txBody>
-          <a:bodyPr/>
-          <a:p/>
-        </p:txBody>
       </p:sp>
       <p:sp>
         <p:nvSpPr>
@@ -15012,10 +14585,6 @@
             <a:prstDash val="solid"/>
           </a:ln>
         </p:spPr>
-        <p:txBody>
-          <a:bodyPr/>
-          <a:p/>
-        </p:txBody>
       </p:sp>
       <p:sp>
         <p:nvSpPr>
@@ -15191,14 +14760,14 @@
             <a:tbl>
               <a:tblPr/>
               <a:tblGrid>
-                <a:gridCol w="1207008"/>
-                <a:gridCol w="881116"/>
-                <a:gridCol w="881116"/>
-                <a:gridCol w="881116"/>
-                <a:gridCol w="881116"/>
-                <a:gridCol w="881116"/>
-                <a:gridCol w="881116"/>
-                <a:gridCol w="881116"/>
+                <a:gridCol w="1463040"/>
+                <a:gridCol w="1335024"/>
+                <a:gridCol w="1335024"/>
+                <a:gridCol w="1335024"/>
+                <a:gridCol w="1335024"/>
+                <a:gridCol w="1335024"/>
+                <a:gridCol w="1335024"/>
+                <a:gridCol w="1335024"/>
               </a:tblGrid>
               <a:tr h="402336">
                 <a:tc>
@@ -15210,7 +14779,7 @@
                         <a:buNone/>
                       </a:pPr>
                       <a:r>
-                        <a:rPr lang="en-US" sz="1200" b="1" dirty="0">
+                        <a:rPr lang="en-US" sz="1300" b="1" dirty="0">
                           <a:solidFill>
                             <a:srgbClr val="F4CE6E"/>
                           </a:solidFill>
@@ -15220,7 +14789,7 @@
                         </a:rPr>
                         <a:t>符號 \ 相連</a:t>
                       </a:r>
-                      <a:endParaRPr lang="en-US" sz="1200" dirty="0">
+                      <a:endParaRPr lang="en-US" sz="1300" dirty="0">
                         <a:latin typeface="Microsoft JhengHei" charset="0"/>
                         <a:ea typeface="Microsoft JhengHei" charset="0"/>
                         <a:cs typeface="Microsoft JhengHei" charset="0"/>
@@ -15278,7 +14847,7 @@
                         <a:buNone/>
                       </a:pPr>
                       <a:r>
-                        <a:rPr lang="en-US" sz="1200" b="1" dirty="0">
+                        <a:rPr lang="en-US" sz="1300" b="1" dirty="0">
                           <a:solidFill>
                             <a:srgbClr val="F4CE6E"/>
                           </a:solidFill>
@@ -15288,7 +14857,7 @@
                         </a:rPr>
                         <a:t>4</a:t>
                       </a:r>
-                      <a:endParaRPr lang="en-US" sz="1200" dirty="0">
+                      <a:endParaRPr lang="en-US" sz="1300" dirty="0">
                         <a:latin typeface="Microsoft JhengHei" charset="0"/>
                         <a:ea typeface="Microsoft JhengHei" charset="0"/>
                         <a:cs typeface="Microsoft JhengHei" charset="0"/>
@@ -15346,7 +14915,7 @@
                         <a:buNone/>
                       </a:pPr>
                       <a:r>
-                        <a:rPr lang="en-US" sz="1200" b="1" dirty="0">
+                        <a:rPr lang="en-US" sz="1300" b="1" dirty="0">
                           <a:solidFill>
                             <a:srgbClr val="F4CE6E"/>
                           </a:solidFill>
@@ -15356,7 +14925,7 @@
                         </a:rPr>
                         <a:t>5</a:t>
                       </a:r>
-                      <a:endParaRPr lang="en-US" sz="1200" dirty="0">
+                      <a:endParaRPr lang="en-US" sz="1300" dirty="0">
                         <a:latin typeface="Microsoft JhengHei" charset="0"/>
                         <a:ea typeface="Microsoft JhengHei" charset="0"/>
                         <a:cs typeface="Microsoft JhengHei" charset="0"/>
@@ -15414,7 +14983,7 @@
                         <a:buNone/>
                       </a:pPr>
                       <a:r>
-                        <a:rPr lang="en-US" sz="1200" b="1" dirty="0">
+                        <a:rPr lang="en-US" sz="1300" b="1" dirty="0">
                           <a:solidFill>
                             <a:srgbClr val="F4CE6E"/>
                           </a:solidFill>
@@ -15424,7 +14993,7 @@
                         </a:rPr>
                         <a:t>6</a:t>
                       </a:r>
-                      <a:endParaRPr lang="en-US" sz="1200" dirty="0">
+                      <a:endParaRPr lang="en-US" sz="1300" dirty="0">
                         <a:latin typeface="Microsoft JhengHei" charset="0"/>
                         <a:ea typeface="Microsoft JhengHei" charset="0"/>
                         <a:cs typeface="Microsoft JhengHei" charset="0"/>
@@ -15482,7 +15051,7 @@
                         <a:buNone/>
                       </a:pPr>
                       <a:r>
-                        <a:rPr lang="en-US" sz="1200" b="1" dirty="0">
+                        <a:rPr lang="en-US" sz="1300" b="1" dirty="0">
                           <a:solidFill>
                             <a:srgbClr val="F4CE6E"/>
                           </a:solidFill>
@@ -15492,7 +15061,7 @@
                         </a:rPr>
                         <a:t>7</a:t>
                       </a:r>
-                      <a:endParaRPr lang="en-US" sz="1200" dirty="0">
+                      <a:endParaRPr lang="en-US" sz="1300" dirty="0">
                         <a:latin typeface="Microsoft JhengHei" charset="0"/>
                         <a:ea typeface="Microsoft JhengHei" charset="0"/>
                         <a:cs typeface="Microsoft JhengHei" charset="0"/>
@@ -15550,7 +15119,7 @@
                         <a:buNone/>
                       </a:pPr>
                       <a:r>
-                        <a:rPr lang="en-US" sz="1200" b="1" dirty="0">
+                        <a:rPr lang="en-US" sz="1300" b="1" dirty="0">
                           <a:solidFill>
                             <a:srgbClr val="F4CE6E"/>
                           </a:solidFill>
@@ -15560,7 +15129,7 @@
                         </a:rPr>
                         <a:t>8</a:t>
                       </a:r>
-                      <a:endParaRPr lang="en-US" sz="1200" dirty="0">
+                      <a:endParaRPr lang="en-US" sz="1300" dirty="0">
                         <a:latin typeface="Microsoft JhengHei" charset="0"/>
                         <a:ea typeface="Microsoft JhengHei" charset="0"/>
                         <a:cs typeface="Microsoft JhengHei" charset="0"/>
@@ -15618,7 +15187,7 @@
                         <a:buNone/>
                       </a:pPr>
                       <a:r>
-                        <a:rPr lang="en-US" sz="1200" b="1" dirty="0">
+                        <a:rPr lang="en-US" sz="1300" b="1" dirty="0">
                           <a:solidFill>
                             <a:srgbClr val="F4CE6E"/>
                           </a:solidFill>
@@ -15628,7 +15197,7 @@
                         </a:rPr>
                         <a:t>9</a:t>
                       </a:r>
-                      <a:endParaRPr lang="en-US" sz="1200" dirty="0">
+                      <a:endParaRPr lang="en-US" sz="1300" dirty="0">
                         <a:latin typeface="Microsoft JhengHei" charset="0"/>
                         <a:ea typeface="Microsoft JhengHei" charset="0"/>
                         <a:cs typeface="Microsoft JhengHei" charset="0"/>
@@ -15686,7 +15255,7 @@
                         <a:buNone/>
                       </a:pPr>
                       <a:r>
-                        <a:rPr lang="en-US" sz="1200" b="1" dirty="0">
+                        <a:rPr lang="en-US" sz="1300" b="1" dirty="0">
                           <a:solidFill>
                             <a:srgbClr val="F4CE6E"/>
                           </a:solidFill>
@@ -15696,7 +15265,7 @@
                         </a:rPr>
                         <a:t>10+</a:t>
                       </a:r>
-                      <a:endParaRPr lang="en-US" sz="1200" dirty="0">
+                      <a:endParaRPr lang="en-US" sz="1300" dirty="0">
                         <a:latin typeface="Microsoft JhengHei" charset="0"/>
                         <a:ea typeface="Microsoft JhengHei" charset="0"/>
                         <a:cs typeface="Microsoft JhengHei" charset="0"/>
@@ -15756,7 +15325,7 @@
                         <a:buNone/>
                       </a:pPr>
                       <a:r>
-                        <a:rPr lang="en-US" sz="1200" b="1" dirty="0">
+                        <a:rPr lang="en-US" sz="1300" b="1" dirty="0">
                           <a:solidFill>
                             <a:srgbClr val="5B1446"/>
                           </a:solidFill>
@@ -15766,7 +15335,7 @@
                         </a:rPr>
                         <a:t>M1</a:t>
                       </a:r>
-                      <a:endParaRPr lang="en-US" sz="1200" dirty="0">
+                      <a:endParaRPr lang="en-US" sz="1300" dirty="0">
                         <a:latin typeface="Microsoft JhengHei" charset="0"/>
                         <a:ea typeface="Microsoft JhengHei" charset="0"/>
                         <a:cs typeface="Microsoft JhengHei" charset="0"/>
@@ -15824,7 +15393,7 @@
                         <a:buNone/>
                       </a:pPr>
                       <a:r>
-                        <a:rPr lang="en-US" sz="1200" dirty="0">
+                        <a:rPr lang="en-US" sz="1300" dirty="0">
                           <a:solidFill>
                             <a:srgbClr val="3B1430"/>
                           </a:solidFill>
@@ -15834,7 +15403,7 @@
                         </a:rPr>
                         <a:t>1</a:t>
                       </a:r>
-                      <a:endParaRPr lang="en-US" sz="1200" dirty="0">
+                      <a:endParaRPr lang="en-US" sz="1300" dirty="0">
                         <a:latin typeface="Microsoft JhengHei" charset="0"/>
                         <a:ea typeface="Microsoft JhengHei" charset="0"/>
                         <a:cs typeface="Microsoft JhengHei" charset="0"/>
@@ -15892,7 +15461,7 @@
                         <a:buNone/>
                       </a:pPr>
                       <a:r>
-                        <a:rPr lang="en-US" sz="1200" dirty="0">
+                        <a:rPr lang="en-US" sz="1300" dirty="0">
                           <a:solidFill>
                             <a:srgbClr val="3B1430"/>
                           </a:solidFill>
@@ -15902,7 +15471,7 @@
                         </a:rPr>
                         <a:t>1.5</a:t>
                       </a:r>
-                      <a:endParaRPr lang="en-US" sz="1200" dirty="0">
+                      <a:endParaRPr lang="en-US" sz="1300" dirty="0">
                         <a:latin typeface="Microsoft JhengHei" charset="0"/>
                         <a:ea typeface="Microsoft JhengHei" charset="0"/>
                         <a:cs typeface="Microsoft JhengHei" charset="0"/>
@@ -15960,7 +15529,7 @@
                         <a:buNone/>
                       </a:pPr>
                       <a:r>
-                        <a:rPr lang="en-US" sz="1200" dirty="0">
+                        <a:rPr lang="en-US" sz="1300" dirty="0">
                           <a:solidFill>
                             <a:srgbClr val="3B1430"/>
                           </a:solidFill>
@@ -15970,7 +15539,7 @@
                         </a:rPr>
                         <a:t>1.75</a:t>
                       </a:r>
-                      <a:endParaRPr lang="en-US" sz="1200" dirty="0">
+                      <a:endParaRPr lang="en-US" sz="1300" dirty="0">
                         <a:latin typeface="Microsoft JhengHei" charset="0"/>
                         <a:ea typeface="Microsoft JhengHei" charset="0"/>
                         <a:cs typeface="Microsoft JhengHei" charset="0"/>
@@ -16028,7 +15597,7 @@
                         <a:buNone/>
                       </a:pPr>
                       <a:r>
-                        <a:rPr lang="en-US" sz="1200" dirty="0">
+                        <a:rPr lang="en-US" sz="1300" dirty="0">
                           <a:solidFill>
                             <a:srgbClr val="3B1430"/>
                           </a:solidFill>
@@ -16038,7 +15607,7 @@
                         </a:rPr>
                         <a:t>2</a:t>
                       </a:r>
-                      <a:endParaRPr lang="en-US" sz="1200" dirty="0">
+                      <a:endParaRPr lang="en-US" sz="1300" dirty="0">
                         <a:latin typeface="Microsoft JhengHei" charset="0"/>
                         <a:ea typeface="Microsoft JhengHei" charset="0"/>
                         <a:cs typeface="Microsoft JhengHei" charset="0"/>
@@ -16096,7 +15665,7 @@
                         <a:buNone/>
                       </a:pPr>
                       <a:r>
-                        <a:rPr lang="en-US" sz="1200" dirty="0">
+                        <a:rPr lang="en-US" sz="1300" dirty="0">
                           <a:solidFill>
                             <a:srgbClr val="3B1430"/>
                           </a:solidFill>
@@ -16106,7 +15675,7 @@
                         </a:rPr>
                         <a:t>7.5</a:t>
                       </a:r>
-                      <a:endParaRPr lang="en-US" sz="1200" dirty="0">
+                      <a:endParaRPr lang="en-US" sz="1300" dirty="0">
                         <a:latin typeface="Microsoft JhengHei" charset="0"/>
                         <a:ea typeface="Microsoft JhengHei" charset="0"/>
                         <a:cs typeface="Microsoft JhengHei" charset="0"/>
@@ -16164,7 +15733,7 @@
                         <a:buNone/>
                       </a:pPr>
                       <a:r>
-                        <a:rPr lang="en-US" sz="1200" dirty="0">
+                        <a:rPr lang="en-US" sz="1300" dirty="0">
                           <a:solidFill>
                             <a:srgbClr val="3B1430"/>
                           </a:solidFill>
@@ -16174,7 +15743,7 @@
                         </a:rPr>
                         <a:t>35</a:t>
                       </a:r>
-                      <a:endParaRPr lang="en-US" sz="1200" dirty="0">
+                      <a:endParaRPr lang="en-US" sz="1300" dirty="0">
                         <a:latin typeface="Microsoft JhengHei" charset="0"/>
                         <a:ea typeface="Microsoft JhengHei" charset="0"/>
                         <a:cs typeface="Microsoft JhengHei" charset="0"/>
@@ -16232,7 +15801,7 @@
                         <a:buNone/>
                       </a:pPr>
                       <a:r>
-                        <a:rPr lang="en-US" sz="1200" dirty="0">
+                        <a:rPr lang="en-US" sz="1300" dirty="0">
                           <a:solidFill>
                             <a:srgbClr val="3B1430"/>
                           </a:solidFill>
@@ -16242,7 +15811,7 @@
                         </a:rPr>
                         <a:t>150</a:t>
                       </a:r>
-                      <a:endParaRPr lang="en-US" sz="1200" dirty="0">
+                      <a:endParaRPr lang="en-US" sz="1300" dirty="0">
                         <a:latin typeface="Microsoft JhengHei" charset="0"/>
                         <a:ea typeface="Microsoft JhengHei" charset="0"/>
                         <a:cs typeface="Microsoft JhengHei" charset="0"/>
@@ -16302,7 +15871,7 @@
                         <a:buNone/>
                       </a:pPr>
                       <a:r>
-                        <a:rPr lang="en-US" sz="1200" b="1" dirty="0">
+                        <a:rPr lang="en-US" sz="1300" b="1" dirty="0">
                           <a:solidFill>
                             <a:srgbClr val="5B1446"/>
                           </a:solidFill>
@@ -16312,7 +15881,7 @@
                         </a:rPr>
                         <a:t>M2</a:t>
                       </a:r>
-                      <a:endParaRPr lang="en-US" sz="1200" dirty="0">
+                      <a:endParaRPr lang="en-US" sz="1300" dirty="0">
                         <a:latin typeface="Microsoft JhengHei" charset="0"/>
                         <a:ea typeface="Microsoft JhengHei" charset="0"/>
                         <a:cs typeface="Microsoft JhengHei" charset="0"/>
@@ -16370,7 +15939,7 @@
                         <a:buNone/>
                       </a:pPr>
                       <a:r>
-                        <a:rPr lang="en-US" sz="1200" dirty="0">
+                        <a:rPr lang="en-US" sz="1300" dirty="0">
                           <a:solidFill>
                             <a:srgbClr val="3B1430"/>
                           </a:solidFill>
@@ -16380,7 +15949,7 @@
                         </a:rPr>
                         <a:t>0.75</a:t>
                       </a:r>
-                      <a:endParaRPr lang="en-US" sz="1200" dirty="0">
+                      <a:endParaRPr lang="en-US" sz="1300" dirty="0">
                         <a:latin typeface="Microsoft JhengHei" charset="0"/>
                         <a:ea typeface="Microsoft JhengHei" charset="0"/>
                         <a:cs typeface="Microsoft JhengHei" charset="0"/>
@@ -16438,7 +16007,7 @@
                         <a:buNone/>
                       </a:pPr>
                       <a:r>
-                        <a:rPr lang="en-US" sz="1200" dirty="0">
+                        <a:rPr lang="en-US" sz="1300" dirty="0">
                           <a:solidFill>
                             <a:srgbClr val="3B1430"/>
                           </a:solidFill>
@@ -16448,7 +16017,7 @@
                         </a:rPr>
                         <a:t>1</a:t>
                       </a:r>
-                      <a:endParaRPr lang="en-US" sz="1200" dirty="0">
+                      <a:endParaRPr lang="en-US" sz="1300" dirty="0">
                         <a:latin typeface="Microsoft JhengHei" charset="0"/>
                         <a:ea typeface="Microsoft JhengHei" charset="0"/>
                         <a:cs typeface="Microsoft JhengHei" charset="0"/>
@@ -16506,7 +16075,7 @@
                         <a:buNone/>
                       </a:pPr>
                       <a:r>
-                        <a:rPr lang="en-US" sz="1200" dirty="0">
+                        <a:rPr lang="en-US" sz="1300" dirty="0">
                           <a:solidFill>
                             <a:srgbClr val="3B1430"/>
                           </a:solidFill>
@@ -16516,7 +16085,7 @@
                         </a:rPr>
                         <a:t>1.25</a:t>
                       </a:r>
-                      <a:endParaRPr lang="en-US" sz="1200" dirty="0">
+                      <a:endParaRPr lang="en-US" sz="1300" dirty="0">
                         <a:latin typeface="Microsoft JhengHei" charset="0"/>
                         <a:ea typeface="Microsoft JhengHei" charset="0"/>
                         <a:cs typeface="Microsoft JhengHei" charset="0"/>
@@ -16574,7 +16143,7 @@
                         <a:buNone/>
                       </a:pPr>
                       <a:r>
-                        <a:rPr lang="en-US" sz="1200" dirty="0">
+                        <a:rPr lang="en-US" sz="1300" dirty="0">
                           <a:solidFill>
                             <a:srgbClr val="3B1430"/>
                           </a:solidFill>
@@ -16584,7 +16153,7 @@
                         </a:rPr>
                         <a:t>1.5</a:t>
                       </a:r>
-                      <a:endParaRPr lang="en-US" sz="1200" dirty="0">
+                      <a:endParaRPr lang="en-US" sz="1300" dirty="0">
                         <a:latin typeface="Microsoft JhengHei" charset="0"/>
                         <a:ea typeface="Microsoft JhengHei" charset="0"/>
                         <a:cs typeface="Microsoft JhengHei" charset="0"/>
@@ -16642,7 +16211,7 @@
                         <a:buNone/>
                       </a:pPr>
                       <a:r>
-                        <a:rPr lang="en-US" sz="1200" dirty="0">
+                        <a:rPr lang="en-US" sz="1300" dirty="0">
                           <a:solidFill>
                             <a:srgbClr val="3B1430"/>
                           </a:solidFill>
@@ -16652,7 +16221,7 @@
                         </a:rPr>
                         <a:t>5</a:t>
                       </a:r>
-                      <a:endParaRPr lang="en-US" sz="1200" dirty="0">
+                      <a:endParaRPr lang="en-US" sz="1300" dirty="0">
                         <a:latin typeface="Microsoft JhengHei" charset="0"/>
                         <a:ea typeface="Microsoft JhengHei" charset="0"/>
                         <a:cs typeface="Microsoft JhengHei" charset="0"/>
@@ -16710,7 +16279,7 @@
                         <a:buNone/>
                       </a:pPr>
                       <a:r>
-                        <a:rPr lang="en-US" sz="1200" dirty="0">
+                        <a:rPr lang="en-US" sz="1300" dirty="0">
                           <a:solidFill>
                             <a:srgbClr val="3B1430"/>
                           </a:solidFill>
@@ -16720,7 +16289,7 @@
                         </a:rPr>
                         <a:t>25</a:t>
                       </a:r>
-                      <a:endParaRPr lang="en-US" sz="1200" dirty="0">
+                      <a:endParaRPr lang="en-US" sz="1300" dirty="0">
                         <a:latin typeface="Microsoft JhengHei" charset="0"/>
                         <a:ea typeface="Microsoft JhengHei" charset="0"/>
                         <a:cs typeface="Microsoft JhengHei" charset="0"/>
@@ -16778,7 +16347,7 @@
                         <a:buNone/>
                       </a:pPr>
                       <a:r>
-                        <a:rPr lang="en-US" sz="1200" dirty="0">
+                        <a:rPr lang="en-US" sz="1300" dirty="0">
                           <a:solidFill>
                             <a:srgbClr val="3B1430"/>
                           </a:solidFill>
@@ -16788,7 +16357,7 @@
                         </a:rPr>
                         <a:t>100</a:t>
                       </a:r>
-                      <a:endParaRPr lang="en-US" sz="1200" dirty="0">
+                      <a:endParaRPr lang="en-US" sz="1300" dirty="0">
                         <a:latin typeface="Microsoft JhengHei" charset="0"/>
                         <a:ea typeface="Microsoft JhengHei" charset="0"/>
                         <a:cs typeface="Microsoft JhengHei" charset="0"/>
@@ -16848,7 +16417,7 @@
                         <a:buNone/>
                       </a:pPr>
                       <a:r>
-                        <a:rPr lang="en-US" sz="1200" b="1" dirty="0">
+                        <a:rPr lang="en-US" sz="1300" b="1" dirty="0">
                           <a:solidFill>
                             <a:srgbClr val="5B1446"/>
                           </a:solidFill>
@@ -16858,7 +16427,7 @@
                         </a:rPr>
                         <a:t>M3</a:t>
                       </a:r>
-                      <a:endParaRPr lang="en-US" sz="1200" dirty="0">
+                      <a:endParaRPr lang="en-US" sz="1300" dirty="0">
                         <a:latin typeface="Microsoft JhengHei" charset="0"/>
                         <a:ea typeface="Microsoft JhengHei" charset="0"/>
                         <a:cs typeface="Microsoft JhengHei" charset="0"/>
@@ -16916,7 +16485,7 @@
                         <a:buNone/>
                       </a:pPr>
                       <a:r>
-                        <a:rPr lang="en-US" sz="1200" dirty="0">
+                        <a:rPr lang="en-US" sz="1300" dirty="0">
                           <a:solidFill>
                             <a:srgbClr val="3B1430"/>
                           </a:solidFill>
@@ -16926,7 +16495,7 @@
                         </a:rPr>
                         <a:t>0.5</a:t>
                       </a:r>
-                      <a:endParaRPr lang="en-US" sz="1200" dirty="0">
+                      <a:endParaRPr lang="en-US" sz="1300" dirty="0">
                         <a:latin typeface="Microsoft JhengHei" charset="0"/>
                         <a:ea typeface="Microsoft JhengHei" charset="0"/>
                         <a:cs typeface="Microsoft JhengHei" charset="0"/>
@@ -16984,7 +16553,7 @@
                         <a:buNone/>
                       </a:pPr>
                       <a:r>
-                        <a:rPr lang="en-US" sz="1200" dirty="0">
+                        <a:rPr lang="en-US" sz="1300" dirty="0">
                           <a:solidFill>
                             <a:srgbClr val="3B1430"/>
                           </a:solidFill>
@@ -16994,7 +16563,7 @@
                         </a:rPr>
                         <a:t>0.75</a:t>
                       </a:r>
-                      <a:endParaRPr lang="en-US" sz="1200" dirty="0">
+                      <a:endParaRPr lang="en-US" sz="1300" dirty="0">
                         <a:latin typeface="Microsoft JhengHei" charset="0"/>
                         <a:ea typeface="Microsoft JhengHei" charset="0"/>
                         <a:cs typeface="Microsoft JhengHei" charset="0"/>
@@ -17052,7 +16621,7 @@
                         <a:buNone/>
                       </a:pPr>
                       <a:r>
-                        <a:rPr lang="en-US" sz="1200" dirty="0">
+                        <a:rPr lang="en-US" sz="1300" dirty="0">
                           <a:solidFill>
                             <a:srgbClr val="3B1430"/>
                           </a:solidFill>
@@ -17062,7 +16631,7 @@
                         </a:rPr>
                         <a:t>1</a:t>
                       </a:r>
-                      <a:endParaRPr lang="en-US" sz="1200" dirty="0">
+                      <a:endParaRPr lang="en-US" sz="1300" dirty="0">
                         <a:latin typeface="Microsoft JhengHei" charset="0"/>
                         <a:ea typeface="Microsoft JhengHei" charset="0"/>
                         <a:cs typeface="Microsoft JhengHei" charset="0"/>
@@ -17120,7 +16689,7 @@
                         <a:buNone/>
                       </a:pPr>
                       <a:r>
-                        <a:rPr lang="en-US" sz="1200" dirty="0">
+                        <a:rPr lang="en-US" sz="1300" dirty="0">
                           <a:solidFill>
                             <a:srgbClr val="3B1430"/>
                           </a:solidFill>
@@ -17130,7 +16699,7 @@
                         </a:rPr>
                         <a:t>1.25</a:t>
                       </a:r>
-                      <a:endParaRPr lang="en-US" sz="1200" dirty="0">
+                      <a:endParaRPr lang="en-US" sz="1300" dirty="0">
                         <a:latin typeface="Microsoft JhengHei" charset="0"/>
                         <a:ea typeface="Microsoft JhengHei" charset="0"/>
                         <a:cs typeface="Microsoft JhengHei" charset="0"/>
@@ -17188,7 +16757,7 @@
                         <a:buNone/>
                       </a:pPr>
                       <a:r>
-                        <a:rPr lang="en-US" sz="1200" dirty="0">
+                        <a:rPr lang="en-US" sz="1300" dirty="0">
                           <a:solidFill>
                             <a:srgbClr val="3B1430"/>
                           </a:solidFill>
@@ -17198,7 +16767,7 @@
                         </a:rPr>
                         <a:t>4.5</a:t>
                       </a:r>
-                      <a:endParaRPr lang="en-US" sz="1200" dirty="0">
+                      <a:endParaRPr lang="en-US" sz="1300" dirty="0">
                         <a:latin typeface="Microsoft JhengHei" charset="0"/>
                         <a:ea typeface="Microsoft JhengHei" charset="0"/>
                         <a:cs typeface="Microsoft JhengHei" charset="0"/>
@@ -17256,7 +16825,7 @@
                         <a:buNone/>
                       </a:pPr>
                       <a:r>
-                        <a:rPr lang="en-US" sz="1200" dirty="0">
+                        <a:rPr lang="en-US" sz="1300" dirty="0">
                           <a:solidFill>
                             <a:srgbClr val="3B1430"/>
                           </a:solidFill>
@@ -17266,7 +16835,7 @@
                         </a:rPr>
                         <a:t>15</a:t>
                       </a:r>
-                      <a:endParaRPr lang="en-US" sz="1200" dirty="0">
+                      <a:endParaRPr lang="en-US" sz="1300" dirty="0">
                         <a:latin typeface="Microsoft JhengHei" charset="0"/>
                         <a:ea typeface="Microsoft JhengHei" charset="0"/>
                         <a:cs typeface="Microsoft JhengHei" charset="0"/>
@@ -17324,7 +16893,7 @@
                         <a:buNone/>
                       </a:pPr>
                       <a:r>
-                        <a:rPr lang="en-US" sz="1200" dirty="0">
+                        <a:rPr lang="en-US" sz="1300" dirty="0">
                           <a:solidFill>
                             <a:srgbClr val="3B1430"/>
                           </a:solidFill>
@@ -17334,7 +16903,7 @@
                         </a:rPr>
                         <a:t>60</a:t>
                       </a:r>
-                      <a:endParaRPr lang="en-US" sz="1200" dirty="0">
+                      <a:endParaRPr lang="en-US" sz="1300" dirty="0">
                         <a:latin typeface="Microsoft JhengHei" charset="0"/>
                         <a:ea typeface="Microsoft JhengHei" charset="0"/>
                         <a:cs typeface="Microsoft JhengHei" charset="0"/>
@@ -17394,7 +16963,7 @@
                         <a:buNone/>
                       </a:pPr>
                       <a:r>
-                        <a:rPr lang="en-US" sz="1200" b="1" dirty="0">
+                        <a:rPr lang="en-US" sz="1300" b="1" dirty="0">
                           <a:solidFill>
                             <a:srgbClr val="5B1446"/>
                           </a:solidFill>
@@ -17404,7 +16973,7 @@
                         </a:rPr>
                         <a:t>M4</a:t>
                       </a:r>
-                      <a:endParaRPr lang="en-US" sz="1200" dirty="0">
+                      <a:endParaRPr lang="en-US" sz="1300" dirty="0">
                         <a:latin typeface="Microsoft JhengHei" charset="0"/>
                         <a:ea typeface="Microsoft JhengHei" charset="0"/>
                         <a:cs typeface="Microsoft JhengHei" charset="0"/>
@@ -17462,7 +17031,7 @@
                         <a:buNone/>
                       </a:pPr>
                       <a:r>
-                        <a:rPr lang="en-US" sz="1200" dirty="0">
+                        <a:rPr lang="en-US" sz="1300" dirty="0">
                           <a:solidFill>
                             <a:srgbClr val="3B1430"/>
                           </a:solidFill>
@@ -17472,7 +17041,7 @@
                         </a:rPr>
                         <a:t>0.4</a:t>
                       </a:r>
-                      <a:endParaRPr lang="en-US" sz="1200" dirty="0">
+                      <a:endParaRPr lang="en-US" sz="1300" dirty="0">
                         <a:latin typeface="Microsoft JhengHei" charset="0"/>
                         <a:ea typeface="Microsoft JhengHei" charset="0"/>
                         <a:cs typeface="Microsoft JhengHei" charset="0"/>
@@ -17530,7 +17099,7 @@
                         <a:buNone/>
                       </a:pPr>
                       <a:r>
-                        <a:rPr lang="en-US" sz="1200" dirty="0">
+                        <a:rPr lang="en-US" sz="1300" dirty="0">
                           <a:solidFill>
                             <a:srgbClr val="3B1430"/>
                           </a:solidFill>
@@ -17540,7 +17109,7 @@
                         </a:rPr>
                         <a:t>0.5</a:t>
                       </a:r>
-                      <a:endParaRPr lang="en-US" sz="1200" dirty="0">
+                      <a:endParaRPr lang="en-US" sz="1300" dirty="0">
                         <a:latin typeface="Microsoft JhengHei" charset="0"/>
                         <a:ea typeface="Microsoft JhengHei" charset="0"/>
                         <a:cs typeface="Microsoft JhengHei" charset="0"/>
@@ -17598,7 +17167,7 @@
                         <a:buNone/>
                       </a:pPr>
                       <a:r>
-                        <a:rPr lang="en-US" sz="1200" dirty="0">
+                        <a:rPr lang="en-US" sz="1300" dirty="0">
                           <a:solidFill>
                             <a:srgbClr val="3B1430"/>
                           </a:solidFill>
@@ -17608,7 +17177,7 @@
                         </a:rPr>
                         <a:t>0.75</a:t>
                       </a:r>
-                      <a:endParaRPr lang="en-US" sz="1200" dirty="0">
+                      <a:endParaRPr lang="en-US" sz="1300" dirty="0">
                         <a:latin typeface="Microsoft JhengHei" charset="0"/>
                         <a:ea typeface="Microsoft JhengHei" charset="0"/>
                         <a:cs typeface="Microsoft JhengHei" charset="0"/>
@@ -17666,7 +17235,7 @@
                         <a:buNone/>
                       </a:pPr>
                       <a:r>
-                        <a:rPr lang="en-US" sz="1200" dirty="0">
+                        <a:rPr lang="en-US" sz="1300" dirty="0">
                           <a:solidFill>
                             <a:srgbClr val="3B1430"/>
                           </a:solidFill>
@@ -17676,7 +17245,7 @@
                         </a:rPr>
                         <a:t>1</a:t>
                       </a:r>
-                      <a:endParaRPr lang="en-US" sz="1200" dirty="0">
+                      <a:endParaRPr lang="en-US" sz="1300" dirty="0">
                         <a:latin typeface="Microsoft JhengHei" charset="0"/>
                         <a:ea typeface="Microsoft JhengHei" charset="0"/>
                         <a:cs typeface="Microsoft JhengHei" charset="0"/>
@@ -17734,7 +17303,7 @@
                         <a:buNone/>
                       </a:pPr>
                       <a:r>
-                        <a:rPr lang="en-US" sz="1200" dirty="0">
+                        <a:rPr lang="en-US" sz="1300" dirty="0">
                           <a:solidFill>
                             <a:srgbClr val="3B1430"/>
                           </a:solidFill>
@@ -17744,7 +17313,7 @@
                         </a:rPr>
                         <a:t>3.5</a:t>
                       </a:r>
-                      <a:endParaRPr lang="en-US" sz="1200" dirty="0">
+                      <a:endParaRPr lang="en-US" sz="1300" dirty="0">
                         <a:latin typeface="Microsoft JhengHei" charset="0"/>
                         <a:ea typeface="Microsoft JhengHei" charset="0"/>
                         <a:cs typeface="Microsoft JhengHei" charset="0"/>
@@ -17802,7 +17371,7 @@
                         <a:buNone/>
                       </a:pPr>
                       <a:r>
-                        <a:rPr lang="en-US" sz="1200" dirty="0">
+                        <a:rPr lang="en-US" sz="1300" dirty="0">
                           <a:solidFill>
                             <a:srgbClr val="3B1430"/>
                           </a:solidFill>
@@ -17812,7 +17381,7 @@
                         </a:rPr>
                         <a:t>12.5</a:t>
                       </a:r>
-                      <a:endParaRPr lang="en-US" sz="1200" dirty="0">
+                      <a:endParaRPr lang="en-US" sz="1300" dirty="0">
                         <a:latin typeface="Microsoft JhengHei" charset="0"/>
                         <a:ea typeface="Microsoft JhengHei" charset="0"/>
                         <a:cs typeface="Microsoft JhengHei" charset="0"/>
@@ -17870,7 +17439,7 @@
                         <a:buNone/>
                       </a:pPr>
                       <a:r>
-                        <a:rPr lang="en-US" sz="1200" dirty="0">
+                        <a:rPr lang="en-US" sz="1300" dirty="0">
                           <a:solidFill>
                             <a:srgbClr val="3B1430"/>
                           </a:solidFill>
@@ -17880,7 +17449,7 @@
                         </a:rPr>
                         <a:t>40</a:t>
                       </a:r>
-                      <a:endParaRPr lang="en-US" sz="1200" dirty="0">
+                      <a:endParaRPr lang="en-US" sz="1300" dirty="0">
                         <a:latin typeface="Microsoft JhengHei" charset="0"/>
                         <a:ea typeface="Microsoft JhengHei" charset="0"/>
                         <a:cs typeface="Microsoft JhengHei" charset="0"/>
@@ -17940,7 +17509,7 @@
                         <a:buNone/>
                       </a:pPr>
                       <a:r>
-                        <a:rPr lang="en-US" sz="1200" b="1" dirty="0">
+                        <a:rPr lang="en-US" sz="1300" b="1" dirty="0">
                           <a:solidFill>
                             <a:srgbClr val="5B1446"/>
                           </a:solidFill>
@@ -17950,7 +17519,7 @@
                         </a:rPr>
                         <a:t>M5</a:t>
                       </a:r>
-                      <a:endParaRPr lang="en-US" sz="1200" dirty="0">
+                      <a:endParaRPr lang="en-US" sz="1300" dirty="0">
                         <a:latin typeface="Microsoft JhengHei" charset="0"/>
                         <a:ea typeface="Microsoft JhengHei" charset="0"/>
                         <a:cs typeface="Microsoft JhengHei" charset="0"/>
@@ -18008,7 +17577,7 @@
                         <a:buNone/>
                       </a:pPr>
                       <a:r>
-                        <a:rPr lang="en-US" sz="1200" dirty="0">
+                        <a:rPr lang="en-US" sz="1300" dirty="0">
                           <a:solidFill>
                             <a:srgbClr val="3B1430"/>
                           </a:solidFill>
@@ -18018,7 +17587,7 @@
                         </a:rPr>
                         <a:t>0.3</a:t>
                       </a:r>
-                      <a:endParaRPr lang="en-US" sz="1200" dirty="0">
+                      <a:endParaRPr lang="en-US" sz="1300" dirty="0">
                         <a:latin typeface="Microsoft JhengHei" charset="0"/>
                         <a:ea typeface="Microsoft JhengHei" charset="0"/>
                         <a:cs typeface="Microsoft JhengHei" charset="0"/>
@@ -18076,7 +17645,7 @@
                         <a:buNone/>
                       </a:pPr>
                       <a:r>
-                        <a:rPr lang="en-US" sz="1200" dirty="0">
+                        <a:rPr lang="en-US" sz="1300" dirty="0">
                           <a:solidFill>
                             <a:srgbClr val="3B1430"/>
                           </a:solidFill>
@@ -18086,7 +17655,7 @@
                         </a:rPr>
                         <a:t>0.4</a:t>
                       </a:r>
-                      <a:endParaRPr lang="en-US" sz="1200" dirty="0">
+                      <a:endParaRPr lang="en-US" sz="1300" dirty="0">
                         <a:latin typeface="Microsoft JhengHei" charset="0"/>
                         <a:ea typeface="Microsoft JhengHei" charset="0"/>
                         <a:cs typeface="Microsoft JhengHei" charset="0"/>
@@ -18144,7 +17713,7 @@
                         <a:buNone/>
                       </a:pPr>
                       <a:r>
-                        <a:rPr lang="en-US" sz="1200" dirty="0">
+                        <a:rPr lang="en-US" sz="1300" dirty="0">
                           <a:solidFill>
                             <a:srgbClr val="3B1430"/>
                           </a:solidFill>
@@ -18154,7 +17723,7 @@
                         </a:rPr>
                         <a:t>0.5</a:t>
                       </a:r>
-                      <a:endParaRPr lang="en-US" sz="1200" dirty="0">
+                      <a:endParaRPr lang="en-US" sz="1300" dirty="0">
                         <a:latin typeface="Microsoft JhengHei" charset="0"/>
                         <a:ea typeface="Microsoft JhengHei" charset="0"/>
                         <a:cs typeface="Microsoft JhengHei" charset="0"/>
@@ -18212,7 +17781,7 @@
                         <a:buNone/>
                       </a:pPr>
                       <a:r>
-                        <a:rPr lang="en-US" sz="1200" dirty="0">
+                        <a:rPr lang="en-US" sz="1300" dirty="0">
                           <a:solidFill>
                             <a:srgbClr val="3B1430"/>
                           </a:solidFill>
@@ -18222,7 +17791,7 @@
                         </a:rPr>
                         <a:t>0.75</a:t>
                       </a:r>
-                      <a:endParaRPr lang="en-US" sz="1200" dirty="0">
+                      <a:endParaRPr lang="en-US" sz="1300" dirty="0">
                         <a:latin typeface="Microsoft JhengHei" charset="0"/>
                         <a:ea typeface="Microsoft JhengHei" charset="0"/>
                         <a:cs typeface="Microsoft JhengHei" charset="0"/>
@@ -18280,7 +17849,7 @@
                         <a:buNone/>
                       </a:pPr>
                       <a:r>
-                        <a:rPr lang="en-US" sz="1200" dirty="0">
+                        <a:rPr lang="en-US" sz="1300" dirty="0">
                           <a:solidFill>
                             <a:srgbClr val="3B1430"/>
                           </a:solidFill>
@@ -18290,7 +17859,7 @@
                         </a:rPr>
                         <a:t>2.5</a:t>
                       </a:r>
-                      <a:endParaRPr lang="en-US" sz="1200" dirty="0">
+                      <a:endParaRPr lang="en-US" sz="1300" dirty="0">
                         <a:latin typeface="Microsoft JhengHei" charset="0"/>
                         <a:ea typeface="Microsoft JhengHei" charset="0"/>
                         <a:cs typeface="Microsoft JhengHei" charset="0"/>
@@ -18348,7 +17917,7 @@
                         <a:buNone/>
                       </a:pPr>
                       <a:r>
-                        <a:rPr lang="en-US" sz="1200" dirty="0">
+                        <a:rPr lang="en-US" sz="1300" dirty="0">
                           <a:solidFill>
                             <a:srgbClr val="3B1430"/>
                           </a:solidFill>
@@ -18358,7 +17927,7 @@
                         </a:rPr>
                         <a:t>10</a:t>
                       </a:r>
-                      <a:endParaRPr lang="en-US" sz="1200" dirty="0">
+                      <a:endParaRPr lang="en-US" sz="1300" dirty="0">
                         <a:latin typeface="Microsoft JhengHei" charset="0"/>
                         <a:ea typeface="Microsoft JhengHei" charset="0"/>
                         <a:cs typeface="Microsoft JhengHei" charset="0"/>
@@ -18416,7 +17985,7 @@
                         <a:buNone/>
                       </a:pPr>
                       <a:r>
-                        <a:rPr lang="en-US" sz="1200" dirty="0">
+                        <a:rPr lang="en-US" sz="1300" dirty="0">
                           <a:solidFill>
                             <a:srgbClr val="3B1430"/>
                           </a:solidFill>
@@ -18426,7 +17995,7 @@
                         </a:rPr>
                         <a:t>30</a:t>
                       </a:r>
-                      <a:endParaRPr lang="en-US" sz="1200" dirty="0">
+                      <a:endParaRPr lang="en-US" sz="1300" dirty="0">
                         <a:latin typeface="Microsoft JhengHei" charset="0"/>
                         <a:ea typeface="Microsoft JhengHei" charset="0"/>
                         <a:cs typeface="Microsoft JhengHei" charset="0"/>
@@ -18486,7 +18055,7 @@
                         <a:buNone/>
                       </a:pPr>
                       <a:r>
-                        <a:rPr lang="en-US" sz="1200" b="1" dirty="0">
+                        <a:rPr lang="en-US" sz="1300" b="1" dirty="0">
                           <a:solidFill>
                             <a:srgbClr val="5B1446"/>
                           </a:solidFill>
@@ -18496,7 +18065,7 @@
                         </a:rPr>
                         <a:t>M6</a:t>
                       </a:r>
-                      <a:endParaRPr lang="en-US" sz="1200" dirty="0">
+                      <a:endParaRPr lang="en-US" sz="1300" dirty="0">
                         <a:latin typeface="Microsoft JhengHei" charset="0"/>
                         <a:ea typeface="Microsoft JhengHei" charset="0"/>
                         <a:cs typeface="Microsoft JhengHei" charset="0"/>
@@ -18554,7 +18123,7 @@
                         <a:buNone/>
                       </a:pPr>
                       <a:r>
-                        <a:rPr lang="en-US" sz="1200" dirty="0">
+                        <a:rPr lang="en-US" sz="1300" dirty="0">
                           <a:solidFill>
                             <a:srgbClr val="3B1430"/>
                           </a:solidFill>
@@ -18564,7 +18133,7 @@
                         </a:rPr>
                         <a:t>0.25</a:t>
                       </a:r>
-                      <a:endParaRPr lang="en-US" sz="1200" dirty="0">
+                      <a:endParaRPr lang="en-US" sz="1300" dirty="0">
                         <a:latin typeface="Microsoft JhengHei" charset="0"/>
                         <a:ea typeface="Microsoft JhengHei" charset="0"/>
                         <a:cs typeface="Microsoft JhengHei" charset="0"/>
@@ -18622,7 +18191,7 @@
                         <a:buNone/>
                       </a:pPr>
                       <a:r>
-                        <a:rPr lang="en-US" sz="1200" dirty="0">
+                        <a:rPr lang="en-US" sz="1300" dirty="0">
                           <a:solidFill>
                             <a:srgbClr val="3B1430"/>
                           </a:solidFill>
@@ -18632,7 +18201,7 @@
                         </a:rPr>
                         <a:t>0.3</a:t>
                       </a:r>
-                      <a:endParaRPr lang="en-US" sz="1200" dirty="0">
+                      <a:endParaRPr lang="en-US" sz="1300" dirty="0">
                         <a:latin typeface="Microsoft JhengHei" charset="0"/>
                         <a:ea typeface="Microsoft JhengHei" charset="0"/>
                         <a:cs typeface="Microsoft JhengHei" charset="0"/>
@@ -18690,7 +18259,7 @@
                         <a:buNone/>
                       </a:pPr>
                       <a:r>
-                        <a:rPr lang="en-US" sz="1200" dirty="0">
+                        <a:rPr lang="en-US" sz="1300" dirty="0">
                           <a:solidFill>
                             <a:srgbClr val="3B1430"/>
                           </a:solidFill>
@@ -18700,7 +18269,7 @@
                         </a:rPr>
                         <a:t>0.4</a:t>
                       </a:r>
-                      <a:endParaRPr lang="en-US" sz="1200" dirty="0">
+                      <a:endParaRPr lang="en-US" sz="1300" dirty="0">
                         <a:latin typeface="Microsoft JhengHei" charset="0"/>
                         <a:ea typeface="Microsoft JhengHei" charset="0"/>
                         <a:cs typeface="Microsoft JhengHei" charset="0"/>
@@ -18758,7 +18327,7 @@
                         <a:buNone/>
                       </a:pPr>
                       <a:r>
-                        <a:rPr lang="en-US" sz="1200" dirty="0">
+                        <a:rPr lang="en-US" sz="1300" dirty="0">
                           <a:solidFill>
                             <a:srgbClr val="3B1430"/>
                           </a:solidFill>
@@ -18768,7 +18337,7 @@
                         </a:rPr>
                         <a:t>0.5</a:t>
                       </a:r>
-                      <a:endParaRPr lang="en-US" sz="1200" dirty="0">
+                      <a:endParaRPr lang="en-US" sz="1300" dirty="0">
                         <a:latin typeface="Microsoft JhengHei" charset="0"/>
                         <a:ea typeface="Microsoft JhengHei" charset="0"/>
                         <a:cs typeface="Microsoft JhengHei" charset="0"/>
@@ -18826,7 +18395,7 @@
                         <a:buNone/>
                       </a:pPr>
                       <a:r>
-                        <a:rPr lang="en-US" sz="1200" dirty="0">
+                        <a:rPr lang="en-US" sz="1300" dirty="0">
                           <a:solidFill>
                             <a:srgbClr val="3B1430"/>
                           </a:solidFill>
@@ -18836,7 +18405,7 @@
                         </a:rPr>
                         <a:t>1.5</a:t>
                       </a:r>
-                      <a:endParaRPr lang="en-US" sz="1200" dirty="0">
+                      <a:endParaRPr lang="en-US" sz="1300" dirty="0">
                         <a:latin typeface="Microsoft JhengHei" charset="0"/>
                         <a:ea typeface="Microsoft JhengHei" charset="0"/>
                         <a:cs typeface="Microsoft JhengHei" charset="0"/>
@@ -18894,7 +18463,7 @@
                         <a:buNone/>
                       </a:pPr>
                       <a:r>
-                        <a:rPr lang="en-US" sz="1200" dirty="0">
+                        <a:rPr lang="en-US" sz="1300" dirty="0">
                           <a:solidFill>
                             <a:srgbClr val="3B1430"/>
                           </a:solidFill>
@@ -18904,7 +18473,7 @@
                         </a:rPr>
                         <a:t>7.5</a:t>
                       </a:r>
-                      <a:endParaRPr lang="en-US" sz="1200" dirty="0">
+                      <a:endParaRPr lang="en-US" sz="1300" dirty="0">
                         <a:latin typeface="Microsoft JhengHei" charset="0"/>
                         <a:ea typeface="Microsoft JhengHei" charset="0"/>
                         <a:cs typeface="Microsoft JhengHei" charset="0"/>
@@ -18962,7 +18531,7 @@
                         <a:buNone/>
                       </a:pPr>
                       <a:r>
-                        <a:rPr lang="en-US" sz="1200" dirty="0">
+                        <a:rPr lang="en-US" sz="1300" dirty="0">
                           <a:solidFill>
                             <a:srgbClr val="3B1430"/>
                           </a:solidFill>
@@ -18972,7 +18541,7 @@
                         </a:rPr>
                         <a:t>25</a:t>
                       </a:r>
-                      <a:endParaRPr lang="en-US" sz="1200" dirty="0">
+                      <a:endParaRPr lang="en-US" sz="1300" dirty="0">
                         <a:latin typeface="Microsoft JhengHei" charset="0"/>
                         <a:ea typeface="Microsoft JhengHei" charset="0"/>
                         <a:cs typeface="Microsoft JhengHei" charset="0"/>
@@ -19059,7 +18628,7 @@
                 <a:ea typeface="Microsoft JhengHei" pitchFamily="34" charset="-122"/>
                 <a:cs typeface="Microsoft JhengHei" pitchFamily="34" charset="-120"/>
               </a:rPr>
-              <a:t>賠率值採 Sugar Rush 賠率表，4~7 連各檔連線數 -1，8／9／10+ 為自訂爆炸區　·　實際獎金 = 群集賠率 × Bet × 全盤倍數和（0 視為 1）</a:t>
+              <a:t>4～7 連沿用 Sugar Rush（連線數 -1），8／9／10+ 為本作自訂爆炸區　·　實際獎金 = 群集賠率 × Bet × 全盤倍數和（0 視為 1）</a:t>
             </a:r>
             <a:endParaRPr lang="en-US" sz="1100" dirty="0"/>
           </a:p>
@@ -19325,10 +18894,6 @@
             <a:prstDash val="solid"/>
           </a:ln>
         </p:spPr>
-        <p:txBody>
-          <a:bodyPr/>
-          <a:p/>
-        </p:txBody>
       </p:sp>
       <p:sp>
         <p:nvSpPr>
@@ -19434,10 +18999,6 @@
             <a:prstDash val="solid"/>
           </a:ln>
         </p:spPr>
-        <p:txBody>
-          <a:bodyPr/>
-          <a:p/>
-        </p:txBody>
       </p:sp>
       <p:sp>
         <p:nvSpPr>
@@ -19543,10 +19104,6 @@
             <a:prstDash val="solid"/>
           </a:ln>
         </p:spPr>
-        <p:txBody>
-          <a:bodyPr/>
-          <a:p/>
-        </p:txBody>
       </p:sp>
       <p:sp>
         <p:nvSpPr>
@@ -19652,10 +19209,6 @@
             <a:prstDash val="solid"/>
           </a:ln>
         </p:spPr>
-        <p:txBody>
-          <a:bodyPr/>
-          <a:p/>
-        </p:txBody>
       </p:sp>
       <p:sp>
         <p:nvSpPr>
@@ -19761,10 +19314,6 @@
             <a:prstDash val="solid"/>
           </a:ln>
         </p:spPr>
-        <p:txBody>
-          <a:bodyPr/>
-          <a:p/>
-        </p:txBody>
       </p:sp>
       <p:sp>
         <p:nvSpPr>
@@ -19870,10 +19419,6 @@
             <a:prstDash val="solid"/>
           </a:ln>
         </p:spPr>
-        <p:txBody>
-          <a:bodyPr/>
-          <a:p/>
-        </p:txBody>
       </p:sp>
       <p:sp>
         <p:nvSpPr>
@@ -20018,10 +19563,6 @@
             <a:prstDash val="solid"/>
           </a:ln>
         </p:spPr>
-        <p:txBody>
-          <a:bodyPr/>
-          <a:p/>
-        </p:txBody>
       </p:sp>
       <p:sp>
         <p:nvSpPr>
@@ -20127,10 +19668,6 @@
             <a:prstDash val="solid"/>
           </a:ln>
         </p:spPr>
-        <p:txBody>
-          <a:bodyPr/>
-          <a:p/>
-        </p:txBody>
       </p:sp>
       <p:sp>
         <p:nvSpPr>
@@ -20197,10 +19734,6 @@
             <a:prstDash val="solid"/>
           </a:ln>
         </p:spPr>
-        <p:txBody>
-          <a:bodyPr/>
-          <a:p/>
-        </p:txBody>
       </p:sp>
       <p:sp>
         <p:nvSpPr>
@@ -20306,10 +19839,6 @@
             <a:prstDash val="solid"/>
           </a:ln>
         </p:spPr>
-        <p:txBody>
-          <a:bodyPr/>
-          <a:p/>
-        </p:txBody>
       </p:sp>
       <p:sp>
         <p:nvSpPr>
@@ -20376,10 +19905,6 @@
             <a:prstDash val="solid"/>
           </a:ln>
         </p:spPr>
-        <p:txBody>
-          <a:bodyPr/>
-          <a:p/>
-        </p:txBody>
       </p:sp>
       <p:sp>
         <p:nvSpPr>
@@ -20414,7 +19939,7 @@
                 <a:ea typeface="Georgia" pitchFamily="34" charset="-122"/>
                 <a:cs typeface="Georgia" pitchFamily="34" charset="-120"/>
               </a:rPr>
-              <a:t>x50</a:t>
+              <a:t>x25</a:t>
             </a:r>
             <a:endParaRPr lang="en-US" sz="900" dirty="0"/>
           </a:p>
@@ -20485,10 +20010,6 @@
             <a:prstDash val="solid"/>
           </a:ln>
         </p:spPr>
-        <p:txBody>
-          <a:bodyPr/>
-          <a:p/>
-        </p:txBody>
       </p:sp>
       <p:sp>
         <p:nvSpPr>
@@ -20775,10 +20296,6 @@
             <a:prstDash val="solid"/>
           </a:ln>
         </p:spPr>
-        <p:txBody>
-          <a:bodyPr/>
-          <a:p/>
-        </p:txBody>
       </p:sp>
       <p:sp>
         <p:nvSpPr>
@@ -20804,10 +20321,6 @@
             <a:prstDash val="solid"/>
           </a:ln>
         </p:spPr>
-        <p:txBody>
-          <a:bodyPr/>
-          <a:p/>
-        </p:txBody>
       </p:sp>
       <p:sp>
         <p:nvSpPr>
@@ -20952,10 +20465,6 @@
             <a:prstDash val="solid"/>
           </a:ln>
         </p:spPr>
-        <p:txBody>
-          <a:bodyPr/>
-          <a:p/>
-        </p:txBody>
       </p:sp>
       <p:sp>
         <p:nvSpPr>
@@ -20981,10 +20490,6 @@
             <a:prstDash val="solid"/>
           </a:ln>
         </p:spPr>
-        <p:txBody>
-          <a:bodyPr/>
-          <a:p/>
-        </p:txBody>
       </p:sp>
       <p:sp>
         <p:nvSpPr>
@@ -21129,10 +20634,6 @@
             <a:prstDash val="solid"/>
           </a:ln>
         </p:spPr>
-        <p:txBody>
-          <a:bodyPr/>
-          <a:p/>
-        </p:txBody>
       </p:sp>
       <p:sp>
         <p:nvSpPr>
@@ -21158,10 +20659,6 @@
             <a:prstDash val="solid"/>
           </a:ln>
         </p:spPr>
-        <p:txBody>
-          <a:bodyPr/>
-          <a:p/>
-        </p:txBody>
       </p:sp>
       <p:sp>
         <p:nvSpPr>
@@ -21306,10 +20803,6 @@
             <a:prstDash val="solid"/>
           </a:ln>
         </p:spPr>
-        <p:txBody>
-          <a:bodyPr/>
-          <a:p/>
-        </p:txBody>
       </p:sp>
       <p:sp>
         <p:nvSpPr>
@@ -21335,10 +20828,6 @@
             <a:prstDash val="solid"/>
           </a:ln>
         </p:spPr>
-        <p:txBody>
-          <a:bodyPr/>
-          <a:p/>
-        </p:txBody>
       </p:sp>
       <p:sp>
         <p:nvSpPr>
@@ -21466,11 +20955,11 @@
         <p:spPr>
           <a:xfrm>
             <a:off x="7525512" y="1261872"/>
-            <a:ext cx="4285398" cy="4974336"/>
+            <a:ext cx="4290150" cy="4974336"/>
           </a:xfrm>
           <a:prstGeom prst="roundRect">
             <a:avLst>
-              <a:gd name="adj" fmla="val 1707"/>
+              <a:gd name="adj" fmla="val 1705"/>
             </a:avLst>
           </a:prstGeom>
           <a:solidFill>
@@ -21490,10 +20979,6 @@
             </a:outerShdw>
           </a:effectLst>
         </p:spPr>
-        <p:txBody>
-          <a:bodyPr/>
-          <a:p/>
-        </p:txBody>
       </p:sp>
       <p:pic>
         <p:nvPicPr>
@@ -21512,7 +20997,7 @@
         <p:spPr>
           <a:xfrm>
             <a:off x="7589520" y="1325880"/>
-            <a:ext cx="4157382" cy="4846320"/>
+            <a:ext cx="4162134" cy="4846320"/>
           </a:xfrm>
           <a:prstGeom prst="rect">
             <a:avLst/>
@@ -21528,7 +21013,7 @@
         <p:spPr>
           <a:xfrm>
             <a:off x="7223760" y="6281928"/>
-            <a:ext cx="4888902" cy="292608"/>
+            <a:ext cx="4893654" cy="292608"/>
           </a:xfrm>
           <a:prstGeom prst="rect">
             <a:avLst/>
@@ -21733,10 +21218,6 @@
             </a:outerShdw>
           </a:effectLst>
         </p:spPr>
-        <p:txBody>
-          <a:bodyPr/>
-          <a:p/>
-        </p:txBody>
       </p:sp>
       <p:pic>
         <p:nvPicPr>
@@ -21883,10 +21364,6 @@
             <a:prstDash val="solid"/>
           </a:ln>
         </p:spPr>
-        <p:txBody>
-          <a:bodyPr/>
-          <a:p/>
-        </p:txBody>
       </p:sp>
       <p:sp>
         <p:nvSpPr>
@@ -21912,10 +21389,6 @@
             <a:prstDash val="solid"/>
           </a:ln>
         </p:spPr>
-        <p:txBody>
-          <a:bodyPr/>
-          <a:p/>
-        </p:txBody>
       </p:sp>
       <p:sp>
         <p:nvSpPr>
@@ -22060,10 +21533,6 @@
             <a:prstDash val="solid"/>
           </a:ln>
         </p:spPr>
-        <p:txBody>
-          <a:bodyPr/>
-          <a:p/>
-        </p:txBody>
       </p:sp>
       <p:sp>
         <p:nvSpPr>
@@ -22089,10 +21558,6 @@
             <a:prstDash val="solid"/>
           </a:ln>
         </p:spPr>
-        <p:txBody>
-          <a:bodyPr/>
-          <a:p/>
-        </p:txBody>
       </p:sp>
       <p:sp>
         <p:nvSpPr>
@@ -22237,10 +21702,6 @@
             <a:prstDash val="solid"/>
           </a:ln>
         </p:spPr>
-        <p:txBody>
-          <a:bodyPr/>
-          <a:p/>
-        </p:txBody>
       </p:sp>
       <p:sp>
         <p:nvSpPr>
@@ -22266,10 +21727,6 @@
             <a:prstDash val="solid"/>
           </a:ln>
         </p:spPr>
-        <p:txBody>
-          <a:bodyPr/>
-          <a:p/>
-        </p:txBody>
       </p:sp>
       <p:sp>
         <p:nvSpPr>
@@ -22438,7 +21895,7 @@
                 <a:ea typeface="Microsoft JhengHei" pitchFamily="34" charset="-122"/>
                 <a:cs typeface="Microsoft JhengHei" pitchFamily="34" charset="-120"/>
               </a:rPr>
-              <a:t>※ 畫面取自糖果轟炸 1000 實機截圖（裁成 5×5），倍數徽章與全盤倍數和為疊加示意（x50、x20 為 Extra Bet 底板）；正式美術待定。</a:t>
+              <a:t>※ 畫面取自糖果轟炸 1000 實機截圖（裁成 5×5），倍數徽章與全盤倍數和為疊加示意（x250、x1000 為 3、4 位數顯示示意）；正式美術待定。</a:t>
             </a:r>
             <a:endParaRPr lang="en-US" sz="1100" dirty="0"/>
           </a:p>
@@ -22707,10 +22164,6 @@
             <a:prstDash val="solid"/>
           </a:ln>
         </p:spPr>
-        <p:txBody>
-          <a:bodyPr/>
-          <a:p/>
-        </p:txBody>
       </p:sp>
       <p:pic>
         <p:nvPicPr>
@@ -22728,8 +22181,8 @@
         </p:blipFill>
         <p:spPr>
           <a:xfrm>
-            <a:off x="1216578" y="2194560"/>
-            <a:ext cx="2157132" cy="2514600"/>
+            <a:off x="1215345" y="2194560"/>
+            <a:ext cx="2159598" cy="2514600"/>
           </a:xfrm>
           <a:prstGeom prst="rect">
             <a:avLst/>
@@ -22876,10 +22329,6 @@
             <a:tailEnd type="triangle"/>
           </a:ln>
         </p:spPr>
-        <p:txBody>
-          <a:bodyPr/>
-          <a:p/>
-        </p:txBody>
       </p:sp>
       <p:sp>
         <p:nvSpPr>
@@ -22907,10 +22356,6 @@
             <a:prstDash val="solid"/>
           </a:ln>
         </p:spPr>
-        <p:txBody>
-          <a:bodyPr/>
-          <a:p/>
-        </p:txBody>
       </p:sp>
       <p:pic>
         <p:nvPicPr>
@@ -22928,8 +22373,8 @@
         </p:blipFill>
         <p:spPr>
           <a:xfrm>
-            <a:off x="5011338" y="2194560"/>
-            <a:ext cx="2157132" cy="2514600"/>
+            <a:off x="5010105" y="2194560"/>
+            <a:ext cx="2159598" cy="2514600"/>
           </a:xfrm>
           <a:prstGeom prst="rect">
             <a:avLst/>
@@ -23076,10 +22521,6 @@
             <a:tailEnd type="triangle"/>
           </a:ln>
         </p:spPr>
-        <p:txBody>
-          <a:bodyPr/>
-          <a:p/>
-        </p:txBody>
       </p:sp>
       <p:sp>
         <p:nvSpPr>
@@ -23107,10 +22548,6 @@
             <a:prstDash val="solid"/>
           </a:ln>
         </p:spPr>
-        <p:txBody>
-          <a:bodyPr/>
-          <a:p/>
-        </p:txBody>
       </p:sp>
       <p:pic>
         <p:nvPicPr>
@@ -23128,8 +22565,8 @@
         </p:blipFill>
         <p:spPr>
           <a:xfrm>
-            <a:off x="8806098" y="2194560"/>
-            <a:ext cx="2157132" cy="2514600"/>
+            <a:off x="8804865" y="2194560"/>
+            <a:ext cx="2159598" cy="2514600"/>
           </a:xfrm>
           <a:prstGeom prst="rect">
             <a:avLst/>
@@ -23527,10 +22964,6 @@
             <a:prstDash val="solid"/>
           </a:ln>
         </p:spPr>
-        <p:txBody>
-          <a:bodyPr/>
-          <a:p/>
-        </p:txBody>
       </p:sp>
       <p:sp>
         <p:nvSpPr>
@@ -23556,10 +22989,6 @@
             <a:prstDash val="solid"/>
           </a:ln>
         </p:spPr>
-        <p:txBody>
-          <a:bodyPr/>
-          <a:p/>
-        </p:txBody>
       </p:sp>
       <p:sp>
         <p:nvSpPr>
@@ -23704,10 +23133,6 @@
             <a:prstDash val="solid"/>
           </a:ln>
         </p:spPr>
-        <p:txBody>
-          <a:bodyPr/>
-          <a:p/>
-        </p:txBody>
       </p:sp>
       <p:sp>
         <p:nvSpPr>
@@ -23733,10 +23158,6 @@
             <a:prstDash val="solid"/>
           </a:ln>
         </p:spPr>
-        <p:txBody>
-          <a:bodyPr/>
-          <a:p/>
-        </p:txBody>
       </p:sp>
       <p:sp>
         <p:nvSpPr>
@@ -23881,10 +23302,6 @@
             <a:prstDash val="solid"/>
           </a:ln>
         </p:spPr>
-        <p:txBody>
-          <a:bodyPr/>
-          <a:p/>
-        </p:txBody>
       </p:sp>
       <p:sp>
         <p:nvSpPr>
@@ -23910,10 +23327,6 @@
             <a:prstDash val="solid"/>
           </a:ln>
         </p:spPr>
-        <p:txBody>
-          <a:bodyPr/>
-          <a:p/>
-        </p:txBody>
       </p:sp>
       <p:sp>
         <p:nvSpPr>
@@ -24041,11 +23454,11 @@
         <p:spPr>
           <a:xfrm>
             <a:off x="5742432" y="2039112"/>
-            <a:ext cx="2951898" cy="3419856"/>
+            <a:ext cx="2955126" cy="3419856"/>
           </a:xfrm>
           <a:prstGeom prst="roundRect">
             <a:avLst>
-              <a:gd name="adj" fmla="val 2478"/>
+              <a:gd name="adj" fmla="val 2475"/>
             </a:avLst>
           </a:prstGeom>
           <a:solidFill>
@@ -24065,10 +23478,6 @@
             </a:outerShdw>
           </a:effectLst>
         </p:spPr>
-        <p:txBody>
-          <a:bodyPr/>
-          <a:p/>
-        </p:txBody>
       </p:sp>
       <p:pic>
         <p:nvPicPr>
@@ -24087,7 +23496,7 @@
         <p:spPr>
           <a:xfrm>
             <a:off x="5806440" y="2103120"/>
-            <a:ext cx="2823882" cy="3291840"/>
+            <a:ext cx="2827110" cy="3291840"/>
           </a:xfrm>
           <a:prstGeom prst="rect">
             <a:avLst/>
@@ -24103,7 +23512,7 @@
         <p:spPr>
           <a:xfrm>
             <a:off x="5440680" y="5504688"/>
-            <a:ext cx="3555402" cy="292608"/>
+            <a:ext cx="3558630" cy="292608"/>
           </a:xfrm>
           <a:prstGeom prst="rect">
             <a:avLst/>
@@ -24142,11 +23551,11 @@
         <p:spPr>
           <a:xfrm>
             <a:off x="8787384" y="2039112"/>
-            <a:ext cx="2951898" cy="3419856"/>
+            <a:ext cx="2955126" cy="3419856"/>
           </a:xfrm>
           <a:prstGeom prst="roundRect">
             <a:avLst>
-              <a:gd name="adj" fmla="val 2478"/>
+              <a:gd name="adj" fmla="val 2475"/>
             </a:avLst>
           </a:prstGeom>
           <a:solidFill>
@@ -24166,10 +23575,6 @@
             </a:outerShdw>
           </a:effectLst>
         </p:spPr>
-        <p:txBody>
-          <a:bodyPr/>
-          <a:p/>
-        </p:txBody>
       </p:sp>
       <p:pic>
         <p:nvPicPr>
@@ -24188,7 +23593,7 @@
         <p:spPr>
           <a:xfrm>
             <a:off x="8851392" y="2103120"/>
-            <a:ext cx="2823882" cy="3291840"/>
+            <a:ext cx="2827110" cy="3291840"/>
           </a:xfrm>
           <a:prstGeom prst="rect">
             <a:avLst/>
@@ -24204,7 +23609,7 @@
         <p:spPr>
           <a:xfrm>
             <a:off x="8485632" y="5504688"/>
-            <a:ext cx="3555402" cy="292608"/>
+            <a:ext cx="3558630" cy="292608"/>
           </a:xfrm>
           <a:prstGeom prst="rect">
             <a:avLst/>
